--- a/IT20_Dispute_Prediction_Presentation.pptx
+++ b/IT20_Dispute_Prediction_Presentation.pptx
@@ -5,14 +5,14 @@
     <p:sldMasterId id="2147483648" r:id="rId1"/>
   </p:sldMasterIdLst>
   <p:sldIdLst>
-    <p:sldId id="256" r:id="rId7"/>
-    <p:sldId id="257" r:id="rId8"/>
-    <p:sldId id="258" r:id="rId9"/>
-    <p:sldId id="259" r:id="rId10"/>
-    <p:sldId id="260" r:id="rId11"/>
-    <p:sldId id="261" r:id="rId12"/>
+    <p:sldId id="256" r:id="rId2"/>
+    <p:sldId id="257" r:id="rId3"/>
+    <p:sldId id="258" r:id="rId4"/>
+    <p:sldId id="259" r:id="rId5"/>
+    <p:sldId id="260" r:id="rId6"/>
+    <p:sldId id="261" r:id="rId7"/>
   </p:sldIdLst>
-  <p:sldSz cx="12188952" cy="6858000" type="screen4x3"/>
+  <p:sldSz cx="12188825" cy="6858000"/>
   <p:notesSz cx="6858000" cy="9144000"/>
   <p:defaultTextStyle>
     <a:defPPr>
@@ -109,6 +109,22 @@
       </a:defRPr>
     </a:lvl9pPr>
   </p:defaultTextStyle>
+  <p:extLst>
+    <p:ext uri="{EFAFB233-063F-42B5-8137-9DF3F51BA10A}">
+      <p15:sldGuideLst xmlns:p15="http://schemas.microsoft.com/office/powerpoint/2012/main">
+        <p15:guide id="1" orient="horz" pos="2160">
+          <p15:clr>
+            <a:srgbClr val="A4A3A4"/>
+          </p15:clr>
+        </p15:guide>
+        <p15:guide id="2" pos="2880">
+          <p15:clr>
+            <a:srgbClr val="A4A3A4"/>
+          </p15:clr>
+        </p15:guide>
+      </p15:sldGuideLst>
+    </p:ext>
+  </p:extLst>
 </p:presentation>
 </file>
 
@@ -150,10 +166,9 @@
           <a:lstStyle/>
           <a:p>
             <a:r>
-              <a:rPr lang="en-US" smtClean="0"/>
+              <a:rPr lang="en-US"/>
               <a:t>Click to edit Master title style</a:t>
             </a:r>
-            <a:endParaRPr lang="en-US"/>
           </a:p>
         </p:txBody>
       </p:sp>
@@ -269,10 +284,9 @@
           </a:lstStyle>
           <a:p>
             <a:r>
-              <a:rPr lang="en-US" smtClean="0"/>
+              <a:rPr lang="en-US"/>
               <a:t>Click to edit Master subtitle style</a:t>
             </a:r>
-            <a:endParaRPr lang="en-US"/>
           </a:p>
         </p:txBody>
       </p:sp>
@@ -293,7 +307,7 @@
           <a:p>
             <a:fld id="{5BCAD085-E8A6-8845-BD4E-CB4CCA059FC4}" type="datetimeFigureOut">
               <a:rPr lang="en-US" smtClean="0"/>
-              <a:t>1/27/13</a:t>
+              <a:t>5/12/2026</a:t>
             </a:fld>
             <a:endParaRPr lang="en-US"/>
           </a:p>
@@ -387,10 +401,9 @@
           <a:lstStyle/>
           <a:p>
             <a:r>
-              <a:rPr lang="en-US" smtClean="0"/>
+              <a:rPr lang="en-US"/>
               <a:t>Click to edit Master title style</a:t>
             </a:r>
-            <a:endParaRPr lang="en-US"/>
           </a:p>
         </p:txBody>
       </p:sp>
@@ -411,38 +424,37 @@
           <a:p>
             <a:pPr lvl="0"/>
             <a:r>
-              <a:rPr lang="en-US" smtClean="0"/>
+              <a:rPr lang="en-US"/>
               <a:t>Click to edit Master text styles</a:t>
             </a:r>
           </a:p>
           <a:p>
             <a:pPr lvl="1"/>
             <a:r>
-              <a:rPr lang="en-US" smtClean="0"/>
+              <a:rPr lang="en-US"/>
               <a:t>Second level</a:t>
             </a:r>
           </a:p>
           <a:p>
             <a:pPr lvl="2"/>
             <a:r>
-              <a:rPr lang="en-US" smtClean="0"/>
+              <a:rPr lang="en-US"/>
               <a:t>Third level</a:t>
             </a:r>
           </a:p>
           <a:p>
             <a:pPr lvl="3"/>
             <a:r>
-              <a:rPr lang="en-US" smtClean="0"/>
+              <a:rPr lang="en-US"/>
               <a:t>Fourth level</a:t>
             </a:r>
           </a:p>
           <a:p>
             <a:pPr lvl="4"/>
             <a:r>
-              <a:rPr lang="en-US" smtClean="0"/>
+              <a:rPr lang="en-US"/>
               <a:t>Fifth level</a:t>
             </a:r>
-            <a:endParaRPr lang="en-US"/>
           </a:p>
         </p:txBody>
       </p:sp>
@@ -463,7 +475,7 @@
           <a:p>
             <a:fld id="{5BCAD085-E8A6-8845-BD4E-CB4CCA059FC4}" type="datetimeFigureOut">
               <a:rPr lang="en-US" smtClean="0"/>
-              <a:t>1/27/13</a:t>
+              <a:t>5/12/2026</a:t>
             </a:fld>
             <a:endParaRPr lang="en-US"/>
           </a:p>
@@ -562,10 +574,9 @@
           <a:lstStyle/>
           <a:p>
             <a:r>
-              <a:rPr lang="en-US" smtClean="0"/>
+              <a:rPr lang="en-US"/>
               <a:t>Click to edit Master title style</a:t>
             </a:r>
-            <a:endParaRPr lang="en-US"/>
           </a:p>
         </p:txBody>
       </p:sp>
@@ -591,38 +602,37 @@
           <a:p>
             <a:pPr lvl="0"/>
             <a:r>
-              <a:rPr lang="en-US" smtClean="0"/>
+              <a:rPr lang="en-US"/>
               <a:t>Click to edit Master text styles</a:t>
             </a:r>
           </a:p>
           <a:p>
             <a:pPr lvl="1"/>
             <a:r>
-              <a:rPr lang="en-US" smtClean="0"/>
+              <a:rPr lang="en-US"/>
               <a:t>Second level</a:t>
             </a:r>
           </a:p>
           <a:p>
             <a:pPr lvl="2"/>
             <a:r>
-              <a:rPr lang="en-US" smtClean="0"/>
+              <a:rPr lang="en-US"/>
               <a:t>Third level</a:t>
             </a:r>
           </a:p>
           <a:p>
             <a:pPr lvl="3"/>
             <a:r>
-              <a:rPr lang="en-US" smtClean="0"/>
+              <a:rPr lang="en-US"/>
               <a:t>Fourth level</a:t>
             </a:r>
           </a:p>
           <a:p>
             <a:pPr lvl="4"/>
             <a:r>
-              <a:rPr lang="en-US" smtClean="0"/>
+              <a:rPr lang="en-US"/>
               <a:t>Fifth level</a:t>
             </a:r>
-            <a:endParaRPr lang="en-US"/>
           </a:p>
         </p:txBody>
       </p:sp>
@@ -643,7 +653,7 @@
           <a:p>
             <a:fld id="{5BCAD085-E8A6-8845-BD4E-CB4CCA059FC4}" type="datetimeFigureOut">
               <a:rPr lang="en-US" smtClean="0"/>
-              <a:t>1/27/13</a:t>
+              <a:t>5/12/2026</a:t>
             </a:fld>
             <a:endParaRPr lang="en-US"/>
           </a:p>
@@ -737,10 +747,9 @@
           <a:lstStyle/>
           <a:p>
             <a:r>
-              <a:rPr lang="en-US" smtClean="0"/>
+              <a:rPr lang="en-US"/>
               <a:t>Click to edit Master title style</a:t>
             </a:r>
-            <a:endParaRPr lang="en-US"/>
           </a:p>
         </p:txBody>
       </p:sp>
@@ -761,38 +770,37 @@
           <a:p>
             <a:pPr lvl="0"/>
             <a:r>
-              <a:rPr lang="en-US" smtClean="0"/>
+              <a:rPr lang="en-US"/>
               <a:t>Click to edit Master text styles</a:t>
             </a:r>
           </a:p>
           <a:p>
             <a:pPr lvl="1"/>
             <a:r>
-              <a:rPr lang="en-US" smtClean="0"/>
+              <a:rPr lang="en-US"/>
               <a:t>Second level</a:t>
             </a:r>
           </a:p>
           <a:p>
             <a:pPr lvl="2"/>
             <a:r>
-              <a:rPr lang="en-US" smtClean="0"/>
+              <a:rPr lang="en-US"/>
               <a:t>Third level</a:t>
             </a:r>
           </a:p>
           <a:p>
             <a:pPr lvl="3"/>
             <a:r>
-              <a:rPr lang="en-US" smtClean="0"/>
+              <a:rPr lang="en-US"/>
               <a:t>Fourth level</a:t>
             </a:r>
           </a:p>
           <a:p>
             <a:pPr lvl="4"/>
             <a:r>
-              <a:rPr lang="en-US" smtClean="0"/>
+              <a:rPr lang="en-US"/>
               <a:t>Fifth level</a:t>
             </a:r>
-            <a:endParaRPr lang="en-US"/>
           </a:p>
         </p:txBody>
       </p:sp>
@@ -813,7 +821,7 @@
           <a:p>
             <a:fld id="{5BCAD085-E8A6-8845-BD4E-CB4CCA059FC4}" type="datetimeFigureOut">
               <a:rPr lang="en-US" smtClean="0"/>
-              <a:t>1/27/13</a:t>
+              <a:t>5/12/2026</a:t>
             </a:fld>
             <a:endParaRPr lang="en-US"/>
           </a:p>
@@ -916,10 +924,9 @@
           </a:lstStyle>
           <a:p>
             <a:r>
-              <a:rPr lang="en-US" smtClean="0"/>
+              <a:rPr lang="en-US"/>
               <a:t>Click to edit Master title style</a:t>
             </a:r>
-            <a:endParaRPr lang="en-US"/>
           </a:p>
         </p:txBody>
       </p:sp>
@@ -1036,7 +1043,7 @@
           <a:p>
             <a:pPr lvl="0"/>
             <a:r>
-              <a:rPr lang="en-US" smtClean="0"/>
+              <a:rPr lang="en-US"/>
               <a:t>Click to edit Master text styles</a:t>
             </a:r>
           </a:p>
@@ -1059,7 +1066,7 @@
           <a:p>
             <a:fld id="{5BCAD085-E8A6-8845-BD4E-CB4CCA059FC4}" type="datetimeFigureOut">
               <a:rPr lang="en-US" smtClean="0"/>
-              <a:t>1/27/13</a:t>
+              <a:t>5/12/2026</a:t>
             </a:fld>
             <a:endParaRPr lang="en-US"/>
           </a:p>
@@ -1153,10 +1160,9 @@
           <a:lstStyle/>
           <a:p>
             <a:r>
-              <a:rPr lang="en-US" smtClean="0"/>
+              <a:rPr lang="en-US"/>
               <a:t>Click to edit Master title style</a:t>
             </a:r>
-            <a:endParaRPr lang="en-US"/>
           </a:p>
         </p:txBody>
       </p:sp>
@@ -1210,38 +1216,37 @@
           <a:p>
             <a:pPr lvl="0"/>
             <a:r>
-              <a:rPr lang="en-US" smtClean="0"/>
+              <a:rPr lang="en-US"/>
               <a:t>Click to edit Master text styles</a:t>
             </a:r>
           </a:p>
           <a:p>
             <a:pPr lvl="1"/>
             <a:r>
-              <a:rPr lang="en-US" smtClean="0"/>
+              <a:rPr lang="en-US"/>
               <a:t>Second level</a:t>
             </a:r>
           </a:p>
           <a:p>
             <a:pPr lvl="2"/>
             <a:r>
-              <a:rPr lang="en-US" smtClean="0"/>
+              <a:rPr lang="en-US"/>
               <a:t>Third level</a:t>
             </a:r>
           </a:p>
           <a:p>
             <a:pPr lvl="3"/>
             <a:r>
-              <a:rPr lang="en-US" smtClean="0"/>
+              <a:rPr lang="en-US"/>
               <a:t>Fourth level</a:t>
             </a:r>
           </a:p>
           <a:p>
             <a:pPr lvl="4"/>
             <a:r>
-              <a:rPr lang="en-US" smtClean="0"/>
+              <a:rPr lang="en-US"/>
               <a:t>Fifth level</a:t>
             </a:r>
-            <a:endParaRPr lang="en-US"/>
           </a:p>
         </p:txBody>
       </p:sp>
@@ -1295,38 +1300,37 @@
           <a:p>
             <a:pPr lvl="0"/>
             <a:r>
-              <a:rPr lang="en-US" smtClean="0"/>
+              <a:rPr lang="en-US"/>
               <a:t>Click to edit Master text styles</a:t>
             </a:r>
           </a:p>
           <a:p>
             <a:pPr lvl="1"/>
             <a:r>
-              <a:rPr lang="en-US" smtClean="0"/>
+              <a:rPr lang="en-US"/>
               <a:t>Second level</a:t>
             </a:r>
           </a:p>
           <a:p>
             <a:pPr lvl="2"/>
             <a:r>
-              <a:rPr lang="en-US" smtClean="0"/>
+              <a:rPr lang="en-US"/>
               <a:t>Third level</a:t>
             </a:r>
           </a:p>
           <a:p>
             <a:pPr lvl="3"/>
             <a:r>
-              <a:rPr lang="en-US" smtClean="0"/>
+              <a:rPr lang="en-US"/>
               <a:t>Fourth level</a:t>
             </a:r>
           </a:p>
           <a:p>
             <a:pPr lvl="4"/>
             <a:r>
-              <a:rPr lang="en-US" smtClean="0"/>
+              <a:rPr lang="en-US"/>
               <a:t>Fifth level</a:t>
             </a:r>
-            <a:endParaRPr lang="en-US"/>
           </a:p>
         </p:txBody>
       </p:sp>
@@ -1347,7 +1351,7 @@
           <a:p>
             <a:fld id="{5BCAD085-E8A6-8845-BD4E-CB4CCA059FC4}" type="datetimeFigureOut">
               <a:rPr lang="en-US" smtClean="0"/>
-              <a:t>1/27/13</a:t>
+              <a:t>5/12/2026</a:t>
             </a:fld>
             <a:endParaRPr lang="en-US"/>
           </a:p>
@@ -1445,10 +1449,9 @@
           </a:lstStyle>
           <a:p>
             <a:r>
-              <a:rPr lang="en-US" smtClean="0"/>
+              <a:rPr lang="en-US"/>
               <a:t>Click to edit Master title style</a:t>
             </a:r>
-            <a:endParaRPr lang="en-US"/>
           </a:p>
         </p:txBody>
       </p:sp>
@@ -1511,7 +1514,7 @@
           <a:p>
             <a:pPr lvl="0"/>
             <a:r>
-              <a:rPr lang="en-US" smtClean="0"/>
+              <a:rPr lang="en-US"/>
               <a:t>Click to edit Master text styles</a:t>
             </a:r>
           </a:p>
@@ -1567,38 +1570,37 @@
           <a:p>
             <a:pPr lvl="0"/>
             <a:r>
-              <a:rPr lang="en-US" smtClean="0"/>
+              <a:rPr lang="en-US"/>
               <a:t>Click to edit Master text styles</a:t>
             </a:r>
           </a:p>
           <a:p>
             <a:pPr lvl="1"/>
             <a:r>
-              <a:rPr lang="en-US" smtClean="0"/>
+              <a:rPr lang="en-US"/>
               <a:t>Second level</a:t>
             </a:r>
           </a:p>
           <a:p>
             <a:pPr lvl="2"/>
             <a:r>
-              <a:rPr lang="en-US" smtClean="0"/>
+              <a:rPr lang="en-US"/>
               <a:t>Third level</a:t>
             </a:r>
           </a:p>
           <a:p>
             <a:pPr lvl="3"/>
             <a:r>
-              <a:rPr lang="en-US" smtClean="0"/>
+              <a:rPr lang="en-US"/>
               <a:t>Fourth level</a:t>
             </a:r>
           </a:p>
           <a:p>
             <a:pPr lvl="4"/>
             <a:r>
-              <a:rPr lang="en-US" smtClean="0"/>
+              <a:rPr lang="en-US"/>
               <a:t>Fifth level</a:t>
             </a:r>
-            <a:endParaRPr lang="en-US"/>
           </a:p>
         </p:txBody>
       </p:sp>
@@ -1661,7 +1663,7 @@
           <a:p>
             <a:pPr lvl="0"/>
             <a:r>
-              <a:rPr lang="en-US" smtClean="0"/>
+              <a:rPr lang="en-US"/>
               <a:t>Click to edit Master text styles</a:t>
             </a:r>
           </a:p>
@@ -1717,38 +1719,37 @@
           <a:p>
             <a:pPr lvl="0"/>
             <a:r>
-              <a:rPr lang="en-US" smtClean="0"/>
+              <a:rPr lang="en-US"/>
               <a:t>Click to edit Master text styles</a:t>
             </a:r>
           </a:p>
           <a:p>
             <a:pPr lvl="1"/>
             <a:r>
-              <a:rPr lang="en-US" smtClean="0"/>
+              <a:rPr lang="en-US"/>
               <a:t>Second level</a:t>
             </a:r>
           </a:p>
           <a:p>
             <a:pPr lvl="2"/>
             <a:r>
-              <a:rPr lang="en-US" smtClean="0"/>
+              <a:rPr lang="en-US"/>
               <a:t>Third level</a:t>
             </a:r>
           </a:p>
           <a:p>
             <a:pPr lvl="3"/>
             <a:r>
-              <a:rPr lang="en-US" smtClean="0"/>
+              <a:rPr lang="en-US"/>
               <a:t>Fourth level</a:t>
             </a:r>
           </a:p>
           <a:p>
             <a:pPr lvl="4"/>
             <a:r>
-              <a:rPr lang="en-US" smtClean="0"/>
+              <a:rPr lang="en-US"/>
               <a:t>Fifth level</a:t>
             </a:r>
-            <a:endParaRPr lang="en-US"/>
           </a:p>
         </p:txBody>
       </p:sp>
@@ -1769,7 +1770,7 @@
           <a:p>
             <a:fld id="{5BCAD085-E8A6-8845-BD4E-CB4CCA059FC4}" type="datetimeFigureOut">
               <a:rPr lang="en-US" smtClean="0"/>
-              <a:t>1/27/13</a:t>
+              <a:t>5/12/2026</a:t>
             </a:fld>
             <a:endParaRPr lang="en-US"/>
           </a:p>
@@ -1863,10 +1864,9 @@
           <a:lstStyle/>
           <a:p>
             <a:r>
-              <a:rPr lang="en-US" smtClean="0"/>
+              <a:rPr lang="en-US"/>
               <a:t>Click to edit Master title style</a:t>
             </a:r>
-            <a:endParaRPr lang="en-US"/>
           </a:p>
         </p:txBody>
       </p:sp>
@@ -1887,7 +1887,7 @@
           <a:p>
             <a:fld id="{5BCAD085-E8A6-8845-BD4E-CB4CCA059FC4}" type="datetimeFigureOut">
               <a:rPr lang="en-US" smtClean="0"/>
-              <a:t>1/27/13</a:t>
+              <a:t>5/12/2026</a:t>
             </a:fld>
             <a:endParaRPr lang="en-US"/>
           </a:p>
@@ -1982,7 +1982,7 @@
           <a:p>
             <a:fld id="{5BCAD085-E8A6-8845-BD4E-CB4CCA059FC4}" type="datetimeFigureOut">
               <a:rPr lang="en-US" smtClean="0"/>
-              <a:t>1/27/13</a:t>
+              <a:t>5/12/2026</a:t>
             </a:fld>
             <a:endParaRPr lang="en-US"/>
           </a:p>
@@ -2085,10 +2085,9 @@
           </a:lstStyle>
           <a:p>
             <a:r>
-              <a:rPr lang="en-US" smtClean="0"/>
+              <a:rPr lang="en-US"/>
               <a:t>Click to edit Master title style</a:t>
             </a:r>
-            <a:endParaRPr lang="en-US"/>
           </a:p>
         </p:txBody>
       </p:sp>
@@ -2142,38 +2141,37 @@
           <a:p>
             <a:pPr lvl="0"/>
             <a:r>
-              <a:rPr lang="en-US" smtClean="0"/>
+              <a:rPr lang="en-US"/>
               <a:t>Click to edit Master text styles</a:t>
             </a:r>
           </a:p>
           <a:p>
             <a:pPr lvl="1"/>
             <a:r>
-              <a:rPr lang="en-US" smtClean="0"/>
+              <a:rPr lang="en-US"/>
               <a:t>Second level</a:t>
             </a:r>
           </a:p>
           <a:p>
             <a:pPr lvl="2"/>
             <a:r>
-              <a:rPr lang="en-US" smtClean="0"/>
+              <a:rPr lang="en-US"/>
               <a:t>Third level</a:t>
             </a:r>
           </a:p>
           <a:p>
             <a:pPr lvl="3"/>
             <a:r>
-              <a:rPr lang="en-US" smtClean="0"/>
+              <a:rPr lang="en-US"/>
               <a:t>Fourth level</a:t>
             </a:r>
           </a:p>
           <a:p>
             <a:pPr lvl="4"/>
             <a:r>
-              <a:rPr lang="en-US" smtClean="0"/>
+              <a:rPr lang="en-US"/>
               <a:t>Fifth level</a:t>
             </a:r>
-            <a:endParaRPr lang="en-US"/>
           </a:p>
         </p:txBody>
       </p:sp>
@@ -2236,7 +2234,7 @@
           <a:p>
             <a:pPr lvl="0"/>
             <a:r>
-              <a:rPr lang="en-US" smtClean="0"/>
+              <a:rPr lang="en-US"/>
               <a:t>Click to edit Master text styles</a:t>
             </a:r>
           </a:p>
@@ -2259,7 +2257,7 @@
           <a:p>
             <a:fld id="{5BCAD085-E8A6-8845-BD4E-CB4CCA059FC4}" type="datetimeFigureOut">
               <a:rPr lang="en-US" smtClean="0"/>
-              <a:t>1/27/13</a:t>
+              <a:t>5/12/2026</a:t>
             </a:fld>
             <a:endParaRPr lang="en-US"/>
           </a:p>
@@ -2362,10 +2360,9 @@
           </a:lstStyle>
           <a:p>
             <a:r>
-              <a:rPr lang="en-US" smtClean="0"/>
+              <a:rPr lang="en-US"/>
               <a:t>Click to edit Master title style</a:t>
             </a:r>
-            <a:endParaRPr lang="en-US"/>
           </a:p>
         </p:txBody>
       </p:sp>
@@ -2489,7 +2486,7 @@
           <a:p>
             <a:pPr lvl="0"/>
             <a:r>
-              <a:rPr lang="en-US" smtClean="0"/>
+              <a:rPr lang="en-US"/>
               <a:t>Click to edit Master text styles</a:t>
             </a:r>
           </a:p>
@@ -2512,7 +2509,7 @@
           <a:p>
             <a:fld id="{5BCAD085-E8A6-8845-BD4E-CB4CCA059FC4}" type="datetimeFigureOut">
               <a:rPr lang="en-US" smtClean="0"/>
-              <a:t>1/27/13</a:t>
+              <a:t>5/12/2026</a:t>
             </a:fld>
             <a:endParaRPr lang="en-US"/>
           </a:p>
@@ -2621,10 +2618,9 @@
           <a:lstStyle/>
           <a:p>
             <a:r>
-              <a:rPr lang="en-US" smtClean="0"/>
+              <a:rPr lang="en-US"/>
               <a:t>Click to edit Master title style</a:t>
             </a:r>
-            <a:endParaRPr lang="en-US"/>
           </a:p>
         </p:txBody>
       </p:sp>
@@ -2655,38 +2651,37 @@
           <a:p>
             <a:pPr lvl="0"/>
             <a:r>
-              <a:rPr lang="en-US" smtClean="0"/>
+              <a:rPr lang="en-US"/>
               <a:t>Click to edit Master text styles</a:t>
             </a:r>
           </a:p>
           <a:p>
             <a:pPr lvl="1"/>
             <a:r>
-              <a:rPr lang="en-US" smtClean="0"/>
+              <a:rPr lang="en-US"/>
               <a:t>Second level</a:t>
             </a:r>
           </a:p>
           <a:p>
             <a:pPr lvl="2"/>
             <a:r>
-              <a:rPr lang="en-US" smtClean="0"/>
+              <a:rPr lang="en-US"/>
               <a:t>Third level</a:t>
             </a:r>
           </a:p>
           <a:p>
             <a:pPr lvl="3"/>
             <a:r>
-              <a:rPr lang="en-US" smtClean="0"/>
+              <a:rPr lang="en-US"/>
               <a:t>Fourth level</a:t>
             </a:r>
           </a:p>
           <a:p>
             <a:pPr lvl="4"/>
             <a:r>
-              <a:rPr lang="en-US" smtClean="0"/>
+              <a:rPr lang="en-US"/>
               <a:t>Fifth level</a:t>
             </a:r>
-            <a:endParaRPr lang="en-US"/>
           </a:p>
         </p:txBody>
       </p:sp>
@@ -2725,7 +2720,7 @@
           <a:p>
             <a:fld id="{5BCAD085-E8A6-8845-BD4E-CB4CCA059FC4}" type="datetimeFigureOut">
               <a:rPr lang="en-US" smtClean="0"/>
-              <a:t>1/27/13</a:t>
+              <a:t>5/12/2026</a:t>
             </a:fld>
             <a:endParaRPr lang="en-US"/>
           </a:p>
@@ -3084,7 +3079,7 @@
 </file>
 
 <file path=ppt/slides/slide1.xml><?xml version="1.0" encoding="utf-8"?>
-<p:sld xmlns:a="http://schemas.openxmlformats.org/drawingml/2006/main" xmlns:p="http://schemas.openxmlformats.org/presentationml/2006/main" xmlns:r="http://schemas.openxmlformats.org/officeDocument/2006/relationships">
+<p:sld xmlns:a="http://schemas.openxmlformats.org/drawingml/2006/main" xmlns:r="http://schemas.openxmlformats.org/officeDocument/2006/relationships" xmlns:p="http://schemas.openxmlformats.org/presentationml/2006/main">
   <p:cSld>
     <p:spTree>
       <p:nvGrpSpPr>
@@ -3092,7 +3087,14 @@
         <p:cNvGrpSpPr/>
         <p:nvPr/>
       </p:nvGrpSpPr>
-      <p:grpSpPr/>
+      <p:grpSpPr>
+        <a:xfrm>
+          <a:off x="0" y="0"/>
+          <a:ext cx="0" cy="0"/>
+          <a:chOff x="0" y="0"/>
+          <a:chExt cx="0" cy="0"/>
+        </a:xfrm>
+      </p:grpSpPr>
       <p:sp>
         <p:nvSpPr>
           <p:cNvPr id="2" name="Rectangle 1"/>
@@ -3133,6 +3135,7 @@
           <a:lstStyle/>
           <a:p>
             <a:pPr algn="ctr"/>
+            <a:endParaRPr sz="2800"/>
           </a:p>
         </p:txBody>
       </p:sp>
@@ -3176,6 +3179,7 @@
           <a:lstStyle/>
           <a:p>
             <a:pPr algn="ctr"/>
+            <a:endParaRPr sz="2800"/>
           </a:p>
         </p:txBody>
       </p:sp>
@@ -3188,7 +3192,7 @@
         <p:spPr>
           <a:xfrm>
             <a:off x="457200" y="1005840"/>
-            <a:ext cx="11247120" cy="822960"/>
+            <a:ext cx="11247120" cy="830997"/>
           </a:xfrm>
           <a:prstGeom prst="rect">
             <a:avLst/>
@@ -3203,7 +3207,7 @@
           <a:p>
             <a:pPr algn="ctr"/>
             <a:r>
-              <a:rPr sz="3600" b="1" i="0">
+              <a:rPr sz="4800" b="1" i="0" dirty="0">
                 <a:solidFill>
                   <a:srgbClr val="FFFFFF"/>
                 </a:solidFill>
@@ -3222,7 +3226,7 @@
         <p:spPr>
           <a:xfrm>
             <a:off x="457200" y="1737360"/>
-            <a:ext cx="11247120" cy="822960"/>
+            <a:ext cx="11247120" cy="830997"/>
           </a:xfrm>
           <a:prstGeom prst="rect">
             <a:avLst/>
@@ -3237,7 +3241,7 @@
           <a:p>
             <a:pPr algn="ctr"/>
             <a:r>
-              <a:rPr sz="3600" b="1" i="0">
+              <a:rPr sz="4800" b="1" i="0">
                 <a:solidFill>
                   <a:srgbClr val="F0B329"/>
                 </a:solidFill>
@@ -3287,6 +3291,7 @@
           <a:lstStyle/>
           <a:p>
             <a:pPr algn="ctr"/>
+            <a:endParaRPr sz="2800"/>
           </a:p>
         </p:txBody>
       </p:sp>
@@ -3299,7 +3304,7 @@
         <p:spPr>
           <a:xfrm>
             <a:off x="457200" y="2743200"/>
-            <a:ext cx="11247120" cy="365760"/>
+            <a:ext cx="11247120" cy="369332"/>
           </a:xfrm>
           <a:prstGeom prst="rect">
             <a:avLst/>
@@ -3314,7 +3319,7 @@
           <a:p>
             <a:pPr algn="ctr"/>
             <a:r>
-              <a:rPr sz="1300" b="0" i="0">
+              <a:rPr b="0" i="0" dirty="0">
                 <a:solidFill>
                   <a:srgbClr val="E8EDF2"/>
                 </a:solidFill>
@@ -3364,6 +3369,7 @@
           <a:lstStyle/>
           <a:p>
             <a:pPr algn="ctr"/>
+            <a:endParaRPr sz="2800"/>
           </a:p>
         </p:txBody>
       </p:sp>
@@ -3407,6 +3413,7 @@
           <a:lstStyle/>
           <a:p>
             <a:pPr algn="ctr"/>
+            <a:endParaRPr sz="2800"/>
           </a:p>
         </p:txBody>
       </p:sp>
@@ -3419,7 +3426,7 @@
         <p:spPr>
           <a:xfrm>
             <a:off x="685800" y="3364992"/>
-            <a:ext cx="10789920" cy="347472"/>
+            <a:ext cx="10789920" cy="400110"/>
           </a:xfrm>
           <a:prstGeom prst="rect">
             <a:avLst/>
@@ -3434,7 +3441,7 @@
           <a:p>
             <a:pPr algn="l"/>
             <a:r>
-              <a:rPr sz="1400" b="1" i="0">
+              <a:rPr sz="2000" b="1" i="0">
                 <a:solidFill>
                   <a:srgbClr val="1A8CC1"/>
                 </a:solidFill>
@@ -3453,7 +3460,7 @@
         <p:spPr>
           <a:xfrm>
             <a:off x="685800" y="3749039"/>
-            <a:ext cx="10972800" cy="1828800"/>
+            <a:ext cx="10972800" cy="1515800"/>
           </a:xfrm>
           <a:prstGeom prst="rect">
             <a:avLst/>
@@ -3472,7 +3479,7 @@
               </a:spcBef>
             </a:pPr>
             <a:r>
-              <a:rPr sz="1500">
+              <a:rPr sz="2000" dirty="0">
                 <a:solidFill>
                   <a:srgbClr val="E8EDF2"/>
                 </a:solidFill>
@@ -3487,12 +3494,12 @@
               </a:spcBef>
             </a:pPr>
             <a:r>
-              <a:rPr sz="1500">
+              <a:rPr sz="2000" dirty="0">
                 <a:solidFill>
                   <a:srgbClr val="E8EDF2"/>
                 </a:solidFill>
               </a:rPr>
-              <a:t>  Collectors currently react after disputes occur — missing early intervention windows</a:t>
+              <a:t>  Collectors currently react after disputes occur missing early intervention windows</a:t>
             </a:r>
           </a:p>
           <a:p>
@@ -3502,7 +3509,7 @@
               </a:spcBef>
             </a:pPr>
             <a:r>
-              <a:rPr sz="1500">
+              <a:rPr sz="2000" dirty="0">
                 <a:solidFill>
                   <a:srgbClr val="E8EDF2"/>
                 </a:solidFill>
@@ -3517,7 +3524,7 @@
               </a:spcBef>
             </a:pPr>
             <a:r>
-              <a:rPr sz="1500">
+              <a:rPr sz="2000" dirty="0">
                 <a:solidFill>
                   <a:srgbClr val="E8EDF2"/>
                 </a:solidFill>
@@ -3567,6 +3574,7 @@
           <a:lstStyle/>
           <a:p>
             <a:pPr algn="ctr"/>
+            <a:endParaRPr sz="2800"/>
           </a:p>
         </p:txBody>
       </p:sp>
@@ -3579,7 +3587,7 @@
         <p:spPr>
           <a:xfrm>
             <a:off x="274320" y="6510528"/>
-            <a:ext cx="9144000" cy="256032"/>
+            <a:ext cx="9144000" cy="276999"/>
           </a:xfrm>
           <a:prstGeom prst="rect">
             <a:avLst/>
@@ -3594,7 +3602,7 @@
           <a:p>
             <a:pPr algn="l"/>
             <a:r>
-              <a:rPr sz="1000" b="0" i="0">
+              <a:rPr sz="1200" b="0" i="0">
                 <a:solidFill>
                   <a:srgbClr val="E8EDF2"/>
                 </a:solidFill>
@@ -3613,7 +3621,7 @@
         <p:spPr>
           <a:xfrm>
             <a:off x="11247120" y="6510528"/>
-            <a:ext cx="731520" cy="256032"/>
+            <a:ext cx="731520" cy="276999"/>
           </a:xfrm>
           <a:prstGeom prst="rect">
             <a:avLst/>
@@ -3628,7 +3636,7 @@
           <a:p>
             <a:pPr algn="r"/>
             <a:r>
-              <a:rPr sz="1000" b="0" i="0">
+              <a:rPr sz="1200" b="0" i="0">
                 <a:solidFill>
                   <a:srgbClr val="E8EDF2"/>
                 </a:solidFill>
@@ -3647,7 +3655,7 @@
 </file>
 
 <file path=ppt/slides/slide2.xml><?xml version="1.0" encoding="utf-8"?>
-<p:sld xmlns:a="http://schemas.openxmlformats.org/drawingml/2006/main" xmlns:p="http://schemas.openxmlformats.org/presentationml/2006/main" xmlns:r="http://schemas.openxmlformats.org/officeDocument/2006/relationships">
+<p:sld xmlns:a="http://schemas.openxmlformats.org/drawingml/2006/main" xmlns:r="http://schemas.openxmlformats.org/officeDocument/2006/relationships" xmlns:p="http://schemas.openxmlformats.org/presentationml/2006/main">
   <p:cSld>
     <p:spTree>
       <p:nvGrpSpPr>
@@ -3655,7 +3663,14 @@
         <p:cNvGrpSpPr/>
         <p:nvPr/>
       </p:nvGrpSpPr>
-      <p:grpSpPr/>
+      <p:grpSpPr>
+        <a:xfrm>
+          <a:off x="0" y="0"/>
+          <a:ext cx="0" cy="0"/>
+          <a:chOff x="0" y="0"/>
+          <a:chExt cx="0" cy="0"/>
+        </a:xfrm>
+      </p:grpSpPr>
       <p:sp>
         <p:nvSpPr>
           <p:cNvPr id="2" name="Rectangle 1"/>
@@ -3696,6 +3711,7 @@
           <a:lstStyle/>
           <a:p>
             <a:pPr algn="ctr"/>
+            <a:endParaRPr/>
           </a:p>
         </p:txBody>
       </p:sp>
@@ -3739,6 +3755,7 @@
           <a:lstStyle/>
           <a:p>
             <a:pPr algn="ctr"/>
+            <a:endParaRPr/>
           </a:p>
         </p:txBody>
       </p:sp>
@@ -3785,7 +3802,7 @@
         <p:spPr>
           <a:xfrm>
             <a:off x="365760" y="685800"/>
-            <a:ext cx="11430000" cy="365760"/>
+            <a:ext cx="11430000" cy="307777"/>
           </a:xfrm>
           <a:prstGeom prst="rect">
             <a:avLst/>
@@ -3800,12 +3817,12 @@
           <a:p>
             <a:pPr algn="l"/>
             <a:r>
-              <a:rPr sz="1400" b="0" i="0">
+              <a:rPr sz="1400" b="0" i="0" dirty="0">
                 <a:solidFill>
                   <a:srgbClr val="E8EDF2"/>
                 </a:solidFill>
               </a:rPr>
-              <a:t>IBM Accounts Receivable Sample — WA_Fn-UseC_-Accounts-Receivable.csv</a:t>
+              <a:t>IBM Accounts Receivable Sample  WA_Fn-UseC_-Accounts-Receivable.csv</a:t>
             </a:r>
           </a:p>
         </p:txBody>
@@ -3850,6 +3867,7 @@
           <a:lstStyle/>
           <a:p>
             <a:pPr algn="ctr"/>
+            <a:endParaRPr/>
           </a:p>
         </p:txBody>
       </p:sp>
@@ -3893,6 +3911,7 @@
           <a:lstStyle/>
           <a:p>
             <a:pPr algn="ctr"/>
+            <a:endParaRPr/>
           </a:p>
         </p:txBody>
       </p:sp>
@@ -3936,6 +3955,7 @@
           <a:lstStyle/>
           <a:p>
             <a:pPr algn="ctr"/>
+            <a:endParaRPr/>
           </a:p>
         </p:txBody>
       </p:sp>
@@ -4081,6 +4101,7 @@
           <a:lstStyle/>
           <a:p>
             <a:pPr algn="ctr"/>
+            <a:endParaRPr/>
           </a:p>
         </p:txBody>
       </p:sp>
@@ -4124,6 +4145,7 @@
           <a:lstStyle/>
           <a:p>
             <a:pPr algn="ctr"/>
+            <a:endParaRPr/>
           </a:p>
         </p:txBody>
       </p:sp>
@@ -4269,6 +4291,7 @@
           <a:lstStyle/>
           <a:p>
             <a:pPr algn="ctr"/>
+            <a:endParaRPr/>
           </a:p>
         </p:txBody>
       </p:sp>
@@ -4312,6 +4335,7 @@
           <a:lstStyle/>
           <a:p>
             <a:pPr algn="ctr"/>
+            <a:endParaRPr/>
           </a:p>
         </p:txBody>
       </p:sp>
@@ -4457,6 +4481,7 @@
           <a:lstStyle/>
           <a:p>
             <a:pPr algn="ctr"/>
+            <a:endParaRPr/>
           </a:p>
         </p:txBody>
       </p:sp>
@@ -4500,6 +4525,7 @@
           <a:lstStyle/>
           <a:p>
             <a:pPr algn="ctr"/>
+            <a:endParaRPr/>
           </a:p>
         </p:txBody>
       </p:sp>
@@ -4645,6 +4671,7 @@
           <a:lstStyle/>
           <a:p>
             <a:pPr algn="ctr"/>
+            <a:endParaRPr/>
           </a:p>
         </p:txBody>
       </p:sp>
@@ -4688,6 +4715,7 @@
           <a:lstStyle/>
           <a:p>
             <a:pPr algn="ctr"/>
+            <a:endParaRPr/>
           </a:p>
         </p:txBody>
       </p:sp>
@@ -4734,7 +4762,7 @@
         <p:spPr>
           <a:xfrm>
             <a:off x="457200" y="3063240"/>
-            <a:ext cx="5303520" cy="3063240"/>
+            <a:ext cx="5303520" cy="1374735"/>
           </a:xfrm>
           <a:prstGeom prst="rect">
             <a:avLst/>
@@ -4746,6 +4774,98 @@
             <a:spAutoFit/>
           </a:bodyPr>
           <a:lstStyle/>
+          <a:p>
+            <a:pPr algn="just">
+              <a:spcBef>
+                <a:spcPts val="400"/>
+              </a:spcBef>
+            </a:pPr>
+            <a:r>
+              <a:rPr sz="1400" dirty="0" err="1">
+                <a:solidFill>
+                  <a:srgbClr val="E8EDF2"/>
+                </a:solidFill>
+              </a:rPr>
+              <a:t>countryCode</a:t>
+            </a:r>
+            <a:r>
+              <a:rPr sz="1400" dirty="0">
+                <a:solidFill>
+                  <a:srgbClr val="E8EDF2"/>
+                </a:solidFill>
+              </a:rPr>
+              <a:t>  — customer country</a:t>
+            </a:r>
+          </a:p>
+          <a:p>
+            <a:pPr algn="just">
+              <a:spcBef>
+                <a:spcPts val="400"/>
+              </a:spcBef>
+            </a:pPr>
+            <a:r>
+              <a:rPr sz="1400" dirty="0" err="1">
+                <a:solidFill>
+                  <a:srgbClr val="E8EDF2"/>
+                </a:solidFill>
+              </a:rPr>
+              <a:t>PaperlessBill</a:t>
+            </a:r>
+            <a:r>
+              <a:rPr sz="1400" dirty="0">
+                <a:solidFill>
+                  <a:srgbClr val="E8EDF2"/>
+                </a:solidFill>
+              </a:rPr>
+              <a:t> — billing preference</a:t>
+            </a:r>
+          </a:p>
+          <a:p>
+            <a:pPr algn="just">
+              <a:spcBef>
+                <a:spcPts val="400"/>
+              </a:spcBef>
+            </a:pPr>
+            <a:r>
+              <a:rPr sz="1400" dirty="0" err="1">
+                <a:solidFill>
+                  <a:srgbClr val="E8EDF2"/>
+                </a:solidFill>
+              </a:rPr>
+              <a:t>InvoiceAmount</a:t>
+            </a:r>
+            <a:r>
+              <a:rPr sz="1400" dirty="0">
+                <a:solidFill>
+                  <a:srgbClr val="E8EDF2"/>
+                </a:solidFill>
+              </a:rPr>
+              <a:t> — invoice value (USD)</a:t>
+            </a:r>
+          </a:p>
+          <a:p>
+            <a:pPr algn="just">
+              <a:spcBef>
+                <a:spcPts val="400"/>
+              </a:spcBef>
+            </a:pPr>
+            <a:r>
+              <a:rPr sz="1400" dirty="0" err="1">
+                <a:solidFill>
+                  <a:srgbClr val="E8EDF2"/>
+                </a:solidFill>
+              </a:rPr>
+              <a:t>CreditTermDays</a:t>
+            </a:r>
+            <a:r>
+              <a:rPr sz="1400" dirty="0">
+                <a:solidFill>
+                  <a:srgbClr val="E8EDF2"/>
+                </a:solidFill>
+              </a:rPr>
+              <a:t> — due date window</a:t>
+            </a:r>
+          </a:p>
           <a:p>
             <a:pPr>
               <a:spcBef>
@@ -4753,14 +4873,183 @@
               </a:spcBef>
             </a:pPr>
             <a:r>
-              <a:rPr sz="1400">
+              <a:rPr sz="1400" dirty="0" err="1">
                 <a:solidFill>
                   <a:srgbClr val="E8EDF2"/>
                 </a:solidFill>
               </a:rPr>
-              <a:t>countryCode  — customer country</a:t>
-            </a:r>
-          </a:p>
+              <a:t>InvoiceMonth</a:t>
+            </a:r>
+            <a:r>
+              <a:rPr sz="1400" dirty="0">
+                <a:solidFill>
+                  <a:srgbClr val="E8EDF2"/>
+                </a:solidFill>
+              </a:rPr>
+              <a:t> / </a:t>
+            </a:r>
+            <a:r>
+              <a:rPr sz="1400" dirty="0" err="1">
+                <a:solidFill>
+                  <a:srgbClr val="E8EDF2"/>
+                </a:solidFill>
+              </a:rPr>
+              <a:t>DayOfWeek</a:t>
+            </a:r>
+            <a:r>
+              <a:rPr sz="1400" dirty="0">
+                <a:solidFill>
+                  <a:srgbClr val="E8EDF2"/>
+                </a:solidFill>
+              </a:rPr>
+              <a:t> / Quarter</a:t>
+            </a:r>
+          </a:p>
+        </p:txBody>
+      </p:sp>
+      <p:sp>
+        <p:nvSpPr>
+          <p:cNvPr id="31" name="Rectangle 30"/>
+          <p:cNvSpPr/>
+          <p:nvPr/>
+        </p:nvSpPr>
+        <p:spPr>
+          <a:xfrm>
+            <a:off x="6080760" y="2651760"/>
+            <a:ext cx="5577840" cy="3566160"/>
+          </a:xfrm>
+          <a:prstGeom prst="rect">
+            <a:avLst/>
+          </a:prstGeom>
+          <a:solidFill>
+            <a:srgbClr val="333D4A"/>
+          </a:solidFill>
+          <a:ln>
+            <a:noFill/>
+          </a:ln>
+        </p:spPr>
+        <p:style>
+          <a:lnRef idx="1">
+            <a:schemeClr val="accent1"/>
+          </a:lnRef>
+          <a:fillRef idx="3">
+            <a:schemeClr val="accent1"/>
+          </a:fillRef>
+          <a:effectRef idx="2">
+            <a:schemeClr val="accent1"/>
+          </a:effectRef>
+          <a:fontRef idx="minor">
+            <a:schemeClr val="lt1"/>
+          </a:fontRef>
+        </p:style>
+        <p:txBody>
+          <a:bodyPr rtlCol="0" anchor="ctr"/>
+          <a:lstStyle/>
+          <a:p>
+            <a:pPr algn="ctr"/>
+            <a:endParaRPr/>
+          </a:p>
+        </p:txBody>
+      </p:sp>
+      <p:sp>
+        <p:nvSpPr>
+          <p:cNvPr id="32" name="Rectangle 31"/>
+          <p:cNvSpPr/>
+          <p:nvPr/>
+        </p:nvSpPr>
+        <p:spPr>
+          <a:xfrm>
+            <a:off x="6080760" y="2651760"/>
+            <a:ext cx="5577840" cy="347472"/>
+          </a:xfrm>
+          <a:prstGeom prst="rect">
+            <a:avLst/>
+          </a:prstGeom>
+          <a:solidFill>
+            <a:srgbClr val="1A8CC1"/>
+          </a:solidFill>
+          <a:ln>
+            <a:noFill/>
+          </a:ln>
+        </p:spPr>
+        <p:style>
+          <a:lnRef idx="1">
+            <a:schemeClr val="accent1"/>
+          </a:lnRef>
+          <a:fillRef idx="3">
+            <a:schemeClr val="accent1"/>
+          </a:fillRef>
+          <a:effectRef idx="2">
+            <a:schemeClr val="accent1"/>
+          </a:effectRef>
+          <a:fontRef idx="minor">
+            <a:schemeClr val="lt1"/>
+          </a:fontRef>
+        </p:style>
+        <p:txBody>
+          <a:bodyPr rtlCol="0" anchor="ctr"/>
+          <a:lstStyle/>
+          <a:p>
+            <a:pPr algn="ctr"/>
+            <a:endParaRPr/>
+          </a:p>
+        </p:txBody>
+      </p:sp>
+      <p:sp>
+        <p:nvSpPr>
+          <p:cNvPr id="33" name="TextBox 32"/>
+          <p:cNvSpPr txBox="1"/>
+          <p:nvPr/>
+        </p:nvSpPr>
+        <p:spPr>
+          <a:xfrm>
+            <a:off x="6190488" y="2688336"/>
+            <a:ext cx="5358384" cy="310896"/>
+          </a:xfrm>
+          <a:prstGeom prst="rect">
+            <a:avLst/>
+          </a:prstGeom>
+          <a:noFill/>
+        </p:spPr>
+        <p:txBody>
+          <a:bodyPr wrap="square">
+            <a:spAutoFit/>
+          </a:bodyPr>
+          <a:lstStyle/>
+          <a:p>
+            <a:pPr algn="l"/>
+            <a:r>
+              <a:rPr sz="1600" b="1" i="0">
+                <a:solidFill>
+                  <a:srgbClr val="FFFFFF"/>
+                </a:solidFill>
+              </a:rPr>
+              <a:t>Additional Features &amp; Excluded Columns</a:t>
+            </a:r>
+          </a:p>
+        </p:txBody>
+      </p:sp>
+      <p:sp>
+        <p:nvSpPr>
+          <p:cNvPr id="34" name="TextBox 33"/>
+          <p:cNvSpPr txBox="1"/>
+          <p:nvPr/>
+        </p:nvSpPr>
+        <p:spPr>
+          <a:xfrm>
+            <a:off x="6217920" y="3063240"/>
+            <a:ext cx="5303520" cy="3063240"/>
+          </a:xfrm>
+          <a:prstGeom prst="rect">
+            <a:avLst/>
+          </a:prstGeom>
+          <a:noFill/>
+        </p:spPr>
+        <p:txBody>
+          <a:bodyPr wrap="square">
+            <a:spAutoFit/>
+          </a:bodyPr>
+          <a:lstStyle/>
           <a:p>
             <a:pPr>
               <a:spcBef>
@@ -4773,7 +5062,7 @@
                   <a:srgbClr val="E8EDF2"/>
                 </a:solidFill>
               </a:rPr>
-              <a:t>PaperlessBill — billing preference</a:t>
+              <a:t>DaysSincePaperless — time on e-billing</a:t>
             </a:r>
           </a:p>
           <a:p>
@@ -4788,7 +5077,7 @@
                   <a:srgbClr val="E8EDF2"/>
                 </a:solidFill>
               </a:rPr>
-              <a:t>InvoiceAmount — invoice value (USD)</a:t>
+              <a:t>CustomerFreq — past invoice count</a:t>
             </a:r>
           </a:p>
           <a:p>
@@ -4797,14 +5086,11 @@
                 <a:spcPts val="400"/>
               </a:spcBef>
             </a:pPr>
-            <a:r>
-              <a:rPr sz="1400">
-                <a:solidFill>
-                  <a:srgbClr val="E8EDF2"/>
-                </a:solidFill>
-              </a:rPr>
-              <a:t>CreditTermDays — due date window</a:t>
-            </a:r>
+            <a:endParaRPr sz="1400">
+              <a:solidFill>
+                <a:srgbClr val="E8EDF2"/>
+              </a:solidFill>
+            </a:endParaRPr>
           </a:p>
           <a:p>
             <a:pPr>
@@ -4818,21 +5104,36 @@
                   <a:srgbClr val="E8EDF2"/>
                 </a:solidFill>
               </a:rPr>
-              <a:t>InvoiceMonth / DayOfWeek / Quarter</a:t>
-            </a:r>
-          </a:p>
-        </p:txBody>
-      </p:sp>
-      <p:sp>
-        <p:nvSpPr>
-          <p:cNvPr id="31" name="Rectangle 30"/>
+              <a:t>⚠  Excluded (future leakage):</a:t>
+            </a:r>
+          </a:p>
+          <a:p>
+            <a:pPr>
+              <a:spcBef>
+                <a:spcPts val="400"/>
+              </a:spcBef>
+            </a:pPr>
+            <a:r>
+              <a:rPr sz="1400">
+                <a:solidFill>
+                  <a:srgbClr val="E8EDF2"/>
+                </a:solidFill>
+              </a:rPr>
+              <a:t>   DaysToSettle, DaysLate, SettledDate</a:t>
+            </a:r>
+          </a:p>
+        </p:txBody>
+      </p:sp>
+      <p:sp>
+        <p:nvSpPr>
+          <p:cNvPr id="35" name="Rectangle 34"/>
           <p:cNvSpPr/>
           <p:nvPr/>
         </p:nvSpPr>
         <p:spPr>
           <a:xfrm>
-            <a:off x="6080760" y="2651760"/>
-            <a:ext cx="5577840" cy="3566160"/>
+            <a:off x="0" y="6492240"/>
+            <a:ext cx="12188952" cy="365760"/>
           </a:xfrm>
           <a:prstGeom prst="rect">
             <a:avLst/>
@@ -4863,224 +5164,7 @@
           <a:lstStyle/>
           <a:p>
             <a:pPr algn="ctr"/>
-          </a:p>
-        </p:txBody>
-      </p:sp>
-      <p:sp>
-        <p:nvSpPr>
-          <p:cNvPr id="32" name="Rectangle 31"/>
-          <p:cNvSpPr/>
-          <p:nvPr/>
-        </p:nvSpPr>
-        <p:spPr>
-          <a:xfrm>
-            <a:off x="6080760" y="2651760"/>
-            <a:ext cx="5577840" cy="347472"/>
-          </a:xfrm>
-          <a:prstGeom prst="rect">
-            <a:avLst/>
-          </a:prstGeom>
-          <a:solidFill>
-            <a:srgbClr val="1A8CC1"/>
-          </a:solidFill>
-          <a:ln>
-            <a:noFill/>
-          </a:ln>
-        </p:spPr>
-        <p:style>
-          <a:lnRef idx="1">
-            <a:schemeClr val="accent1"/>
-          </a:lnRef>
-          <a:fillRef idx="3">
-            <a:schemeClr val="accent1"/>
-          </a:fillRef>
-          <a:effectRef idx="2">
-            <a:schemeClr val="accent1"/>
-          </a:effectRef>
-          <a:fontRef idx="minor">
-            <a:schemeClr val="lt1"/>
-          </a:fontRef>
-        </p:style>
-        <p:txBody>
-          <a:bodyPr rtlCol="0" anchor="ctr"/>
-          <a:lstStyle/>
-          <a:p>
-            <a:pPr algn="ctr"/>
-          </a:p>
-        </p:txBody>
-      </p:sp>
-      <p:sp>
-        <p:nvSpPr>
-          <p:cNvPr id="33" name="TextBox 32"/>
-          <p:cNvSpPr txBox="1"/>
-          <p:nvPr/>
-        </p:nvSpPr>
-        <p:spPr>
-          <a:xfrm>
-            <a:off x="6190488" y="2688336"/>
-            <a:ext cx="5358384" cy="310896"/>
-          </a:xfrm>
-          <a:prstGeom prst="rect">
-            <a:avLst/>
-          </a:prstGeom>
-          <a:noFill/>
-        </p:spPr>
-        <p:txBody>
-          <a:bodyPr wrap="square">
-            <a:spAutoFit/>
-          </a:bodyPr>
-          <a:lstStyle/>
-          <a:p>
-            <a:pPr algn="l"/>
-            <a:r>
-              <a:rPr sz="1600" b="1" i="0">
-                <a:solidFill>
-                  <a:srgbClr val="FFFFFF"/>
-                </a:solidFill>
-              </a:rPr>
-              <a:t>Additional Features &amp; Excluded Columns</a:t>
-            </a:r>
-          </a:p>
-        </p:txBody>
-      </p:sp>
-      <p:sp>
-        <p:nvSpPr>
-          <p:cNvPr id="34" name="TextBox 33"/>
-          <p:cNvSpPr txBox="1"/>
-          <p:nvPr/>
-        </p:nvSpPr>
-        <p:spPr>
-          <a:xfrm>
-            <a:off x="6217920" y="3063240"/>
-            <a:ext cx="5303520" cy="3063240"/>
-          </a:xfrm>
-          <a:prstGeom prst="rect">
-            <a:avLst/>
-          </a:prstGeom>
-          <a:noFill/>
-        </p:spPr>
-        <p:txBody>
-          <a:bodyPr wrap="square">
-            <a:spAutoFit/>
-          </a:bodyPr>
-          <a:lstStyle/>
-          <a:p>
-            <a:pPr>
-              <a:spcBef>
-                <a:spcPts val="400"/>
-              </a:spcBef>
-            </a:pPr>
-            <a:r>
-              <a:rPr sz="1400">
-                <a:solidFill>
-                  <a:srgbClr val="E8EDF2"/>
-                </a:solidFill>
-              </a:rPr>
-              <a:t>DaysSincePaperless — time on e-billing</a:t>
-            </a:r>
-          </a:p>
-          <a:p>
-            <a:pPr>
-              <a:spcBef>
-                <a:spcPts val="400"/>
-              </a:spcBef>
-            </a:pPr>
-            <a:r>
-              <a:rPr sz="1400">
-                <a:solidFill>
-                  <a:srgbClr val="E8EDF2"/>
-                </a:solidFill>
-              </a:rPr>
-              <a:t>CustomerFreq — past invoice count</a:t>
-            </a:r>
-          </a:p>
-          <a:p>
-            <a:pPr>
-              <a:spcBef>
-                <a:spcPts val="400"/>
-              </a:spcBef>
-            </a:pPr>
-            <a:r>
-              <a:rPr sz="1400">
-                <a:solidFill>
-                  <a:srgbClr val="E8EDF2"/>
-                </a:solidFill>
-              </a:rPr>
-              <a:t/>
-            </a:r>
-          </a:p>
-          <a:p>
-            <a:pPr>
-              <a:spcBef>
-                <a:spcPts val="400"/>
-              </a:spcBef>
-            </a:pPr>
-            <a:r>
-              <a:rPr sz="1400">
-                <a:solidFill>
-                  <a:srgbClr val="E8EDF2"/>
-                </a:solidFill>
-              </a:rPr>
-              <a:t>⚠  Excluded (future leakage):</a:t>
-            </a:r>
-          </a:p>
-          <a:p>
-            <a:pPr>
-              <a:spcBef>
-                <a:spcPts val="400"/>
-              </a:spcBef>
-            </a:pPr>
-            <a:r>
-              <a:rPr sz="1400">
-                <a:solidFill>
-                  <a:srgbClr val="E8EDF2"/>
-                </a:solidFill>
-              </a:rPr>
-              <a:t>   DaysToSettle, DaysLate, SettledDate</a:t>
-            </a:r>
-          </a:p>
-        </p:txBody>
-      </p:sp>
-      <p:sp>
-        <p:nvSpPr>
-          <p:cNvPr id="35" name="Rectangle 34"/>
-          <p:cNvSpPr/>
-          <p:nvPr/>
-        </p:nvSpPr>
-        <p:spPr>
-          <a:xfrm>
-            <a:off x="0" y="6492240"/>
-            <a:ext cx="12188952" cy="365760"/>
-          </a:xfrm>
-          <a:prstGeom prst="rect">
-            <a:avLst/>
-          </a:prstGeom>
-          <a:solidFill>
-            <a:srgbClr val="333D4A"/>
-          </a:solidFill>
-          <a:ln>
-            <a:noFill/>
-          </a:ln>
-        </p:spPr>
-        <p:style>
-          <a:lnRef idx="1">
-            <a:schemeClr val="accent1"/>
-          </a:lnRef>
-          <a:fillRef idx="3">
-            <a:schemeClr val="accent1"/>
-          </a:fillRef>
-          <a:effectRef idx="2">
-            <a:schemeClr val="accent1"/>
-          </a:effectRef>
-          <a:fontRef idx="minor">
-            <a:schemeClr val="lt1"/>
-          </a:fontRef>
-        </p:style>
-        <p:txBody>
-          <a:bodyPr rtlCol="0" anchor="ctr"/>
-          <a:lstStyle/>
-          <a:p>
-            <a:pPr algn="ctr"/>
+            <a:endParaRPr/>
           </a:p>
         </p:txBody>
       </p:sp>
@@ -5161,7 +5245,7 @@
 </file>
 
 <file path=ppt/slides/slide3.xml><?xml version="1.0" encoding="utf-8"?>
-<p:sld xmlns:a="http://schemas.openxmlformats.org/drawingml/2006/main" xmlns:p="http://schemas.openxmlformats.org/presentationml/2006/main" xmlns:r="http://schemas.openxmlformats.org/officeDocument/2006/relationships">
+<p:sld xmlns:a="http://schemas.openxmlformats.org/drawingml/2006/main" xmlns:r="http://schemas.openxmlformats.org/officeDocument/2006/relationships" xmlns:p="http://schemas.openxmlformats.org/presentationml/2006/main">
   <p:cSld>
     <p:spTree>
       <p:nvGrpSpPr>
@@ -5169,7 +5253,14 @@
         <p:cNvGrpSpPr/>
         <p:nvPr/>
       </p:nvGrpSpPr>
-      <p:grpSpPr/>
+      <p:grpSpPr>
+        <a:xfrm>
+          <a:off x="0" y="0"/>
+          <a:ext cx="0" cy="0"/>
+          <a:chOff x="0" y="0"/>
+          <a:chExt cx="0" cy="0"/>
+        </a:xfrm>
+      </p:grpSpPr>
       <p:sp>
         <p:nvSpPr>
           <p:cNvPr id="2" name="Rectangle 1"/>
@@ -5210,6 +5301,7 @@
           <a:lstStyle/>
           <a:p>
             <a:pPr algn="ctr"/>
+            <a:endParaRPr/>
           </a:p>
         </p:txBody>
       </p:sp>
@@ -5253,6 +5345,7 @@
           <a:lstStyle/>
           <a:p>
             <a:pPr algn="ctr"/>
+            <a:endParaRPr/>
           </a:p>
         </p:txBody>
       </p:sp>
@@ -5364,6 +5457,7 @@
           <a:lstStyle/>
           <a:p>
             <a:pPr algn="ctr"/>
+            <a:endParaRPr/>
           </a:p>
         </p:txBody>
       </p:sp>
@@ -5407,6 +5501,7 @@
           <a:lstStyle/>
           <a:p>
             <a:pPr algn="ctr"/>
+            <a:endParaRPr/>
           </a:p>
         </p:txBody>
       </p:sp>
@@ -5450,6 +5545,7 @@
           <a:lstStyle/>
           <a:p>
             <a:pPr algn="ctr"/>
+            <a:endParaRPr/>
           </a:p>
         </p:txBody>
       </p:sp>
@@ -5589,14 +5685,11 @@
                 <a:spcPts val="400"/>
               </a:spcBef>
             </a:pPr>
-            <a:r>
-              <a:rPr sz="1400">
-                <a:solidFill>
-                  <a:srgbClr val="E8EDF2"/>
-                </a:solidFill>
-              </a:rPr>
-              <a:t/>
-            </a:r>
+            <a:endParaRPr sz="1400">
+              <a:solidFill>
+                <a:srgbClr val="E8EDF2"/>
+              </a:solidFill>
+            </a:endParaRPr>
           </a:p>
           <a:p>
             <a:pPr>
@@ -5670,6 +5763,7 @@
           <a:lstStyle/>
           <a:p>
             <a:pPr algn="ctr"/>
+            <a:endParaRPr/>
           </a:p>
         </p:txBody>
       </p:sp>
@@ -5713,6 +5807,7 @@
           <a:lstStyle/>
           <a:p>
             <a:pPr algn="ctr"/>
+            <a:endParaRPr/>
           </a:p>
         </p:txBody>
       </p:sp>
@@ -5901,7 +5996,7 @@
         </p:nvSpPr>
         <p:spPr>
           <a:xfrm>
-            <a:off x="5486400" y="3474720"/>
+            <a:off x="5545772" y="3474720"/>
             <a:ext cx="548640" cy="548640"/>
           </a:xfrm>
           <a:prstGeom prst="rect">
@@ -5917,7 +6012,7 @@
           <a:p>
             <a:pPr algn="ctr"/>
             <a:r>
-              <a:rPr sz="3000" b="1" i="0">
+              <a:rPr sz="3000" b="1" i="0" dirty="0">
                 <a:solidFill>
                   <a:srgbClr val="F0B329"/>
                 </a:solidFill>
@@ -5967,6 +6062,7 @@
           <a:lstStyle/>
           <a:p>
             <a:pPr algn="ctr"/>
+            <a:endParaRPr/>
           </a:p>
         </p:txBody>
       </p:sp>
@@ -6047,7 +6143,7 @@
 </file>
 
 <file path=ppt/slides/slide4.xml><?xml version="1.0" encoding="utf-8"?>
-<p:sld xmlns:a="http://schemas.openxmlformats.org/drawingml/2006/main" xmlns:p="http://schemas.openxmlformats.org/presentationml/2006/main" xmlns:r="http://schemas.openxmlformats.org/officeDocument/2006/relationships">
+<p:sld xmlns:a="http://schemas.openxmlformats.org/drawingml/2006/main" xmlns:r="http://schemas.openxmlformats.org/officeDocument/2006/relationships" xmlns:p="http://schemas.openxmlformats.org/presentationml/2006/main">
   <p:cSld>
     <p:spTree>
       <p:nvGrpSpPr>
@@ -6055,7 +6151,14 @@
         <p:cNvGrpSpPr/>
         <p:nvPr/>
       </p:nvGrpSpPr>
-      <p:grpSpPr/>
+      <p:grpSpPr>
+        <a:xfrm>
+          <a:off x="0" y="0"/>
+          <a:ext cx="0" cy="0"/>
+          <a:chOff x="0" y="0"/>
+          <a:chExt cx="0" cy="0"/>
+        </a:xfrm>
+      </p:grpSpPr>
       <p:sp>
         <p:nvSpPr>
           <p:cNvPr id="2" name="Rectangle 1"/>
@@ -6096,6 +6199,7 @@
           <a:lstStyle/>
           <a:p>
             <a:pPr algn="ctr"/>
+            <a:endParaRPr/>
           </a:p>
         </p:txBody>
       </p:sp>
@@ -6139,6 +6243,7 @@
           <a:lstStyle/>
           <a:p>
             <a:pPr algn="ctr"/>
+            <a:endParaRPr/>
           </a:p>
         </p:txBody>
       </p:sp>
@@ -6250,6 +6355,7 @@
           <a:lstStyle/>
           <a:p>
             <a:pPr algn="ctr"/>
+            <a:endParaRPr/>
           </a:p>
         </p:txBody>
       </p:sp>
@@ -6293,6 +6399,7 @@
           <a:lstStyle/>
           <a:p>
             <a:pPr algn="ctr"/>
+            <a:endParaRPr/>
           </a:p>
         </p:txBody>
       </p:sp>
@@ -6336,6 +6443,7 @@
           <a:lstStyle/>
           <a:p>
             <a:pPr algn="ctr"/>
+            <a:endParaRPr/>
           </a:p>
         </p:txBody>
       </p:sp>
@@ -6447,6 +6555,7 @@
           <a:lstStyle/>
           <a:p>
             <a:pPr algn="ctr"/>
+            <a:endParaRPr/>
           </a:p>
         </p:txBody>
       </p:sp>
@@ -6490,6 +6599,7 @@
           <a:lstStyle/>
           <a:p>
             <a:pPr algn="ctr"/>
+            <a:endParaRPr/>
           </a:p>
         </p:txBody>
       </p:sp>
@@ -6635,6 +6745,7 @@
           <a:lstStyle/>
           <a:p>
             <a:pPr algn="ctr"/>
+            <a:endParaRPr/>
           </a:p>
         </p:txBody>
       </p:sp>
@@ -6678,6 +6789,7 @@
           <a:lstStyle/>
           <a:p>
             <a:pPr algn="ctr"/>
+            <a:endParaRPr/>
           </a:p>
         </p:txBody>
       </p:sp>
@@ -6789,6 +6901,7 @@
           <a:lstStyle/>
           <a:p>
             <a:pPr algn="ctr"/>
+            <a:endParaRPr/>
           </a:p>
         </p:txBody>
       </p:sp>
@@ -6832,6 +6945,7 @@
           <a:lstStyle/>
           <a:p>
             <a:pPr algn="ctr"/>
+            <a:endParaRPr/>
           </a:p>
         </p:txBody>
       </p:sp>
@@ -6943,6 +7057,7 @@
           <a:lstStyle/>
           <a:p>
             <a:pPr algn="ctr"/>
+            <a:endParaRPr/>
           </a:p>
         </p:txBody>
       </p:sp>
@@ -6986,6 +7101,7 @@
           <a:lstStyle/>
           <a:p>
             <a:pPr algn="ctr"/>
+            <a:endParaRPr/>
           </a:p>
         </p:txBody>
       </p:sp>
@@ -7165,6 +7281,7 @@
           <a:lstStyle/>
           <a:p>
             <a:pPr algn="ctr"/>
+            <a:endParaRPr/>
           </a:p>
         </p:txBody>
       </p:sp>
@@ -7242,6 +7359,7 @@
           <a:lstStyle/>
           <a:p>
             <a:pPr algn="ctr"/>
+            <a:endParaRPr/>
           </a:p>
         </p:txBody>
       </p:sp>
@@ -7319,6 +7437,7 @@
           <a:lstStyle/>
           <a:p>
             <a:pPr algn="ctr"/>
+            <a:endParaRPr/>
           </a:p>
         </p:txBody>
       </p:sp>
@@ -7396,6 +7515,7 @@
           <a:lstStyle/>
           <a:p>
             <a:pPr algn="ctr"/>
+            <a:endParaRPr/>
           </a:p>
         </p:txBody>
       </p:sp>
@@ -7473,6 +7593,7 @@
           <a:lstStyle/>
           <a:p>
             <a:pPr algn="ctr"/>
+            <a:endParaRPr/>
           </a:p>
         </p:txBody>
       </p:sp>
@@ -7550,6 +7671,7 @@
           <a:lstStyle/>
           <a:p>
             <a:pPr algn="ctr"/>
+            <a:endParaRPr/>
           </a:p>
         </p:txBody>
       </p:sp>
@@ -7627,6 +7749,7 @@
           <a:lstStyle/>
           <a:p>
             <a:pPr algn="ctr"/>
+            <a:endParaRPr/>
           </a:p>
         </p:txBody>
       </p:sp>
@@ -7670,6 +7793,7 @@
           <a:lstStyle/>
           <a:p>
             <a:pPr algn="ctr"/>
+            <a:endParaRPr/>
           </a:p>
         </p:txBody>
       </p:sp>
@@ -7747,6 +7871,7 @@
           <a:lstStyle/>
           <a:p>
             <a:pPr algn="ctr"/>
+            <a:endParaRPr/>
           </a:p>
         </p:txBody>
       </p:sp>
@@ -7790,6 +7915,7 @@
           <a:lstStyle/>
           <a:p>
             <a:pPr algn="ctr"/>
+            <a:endParaRPr/>
           </a:p>
         </p:txBody>
       </p:sp>
@@ -7867,6 +7993,7 @@
           <a:lstStyle/>
           <a:p>
             <a:pPr algn="ctr"/>
+            <a:endParaRPr/>
           </a:p>
         </p:txBody>
       </p:sp>
@@ -7910,6 +8037,7 @@
           <a:lstStyle/>
           <a:p>
             <a:pPr algn="ctr"/>
+            <a:endParaRPr/>
           </a:p>
         </p:txBody>
       </p:sp>
@@ -7987,6 +8115,7 @@
           <a:lstStyle/>
           <a:p>
             <a:pPr algn="ctr"/>
+            <a:endParaRPr/>
           </a:p>
         </p:txBody>
       </p:sp>
@@ -8030,6 +8159,7 @@
           <a:lstStyle/>
           <a:p>
             <a:pPr algn="ctr"/>
+            <a:endParaRPr/>
           </a:p>
         </p:txBody>
       </p:sp>
@@ -8107,6 +8237,7 @@
           <a:lstStyle/>
           <a:p>
             <a:pPr algn="ctr"/>
+            <a:endParaRPr/>
           </a:p>
         </p:txBody>
       </p:sp>
@@ -8150,6 +8281,7 @@
           <a:lstStyle/>
           <a:p>
             <a:pPr algn="ctr"/>
+            <a:endParaRPr/>
           </a:p>
         </p:txBody>
       </p:sp>
@@ -8227,6 +8359,7 @@
           <a:lstStyle/>
           <a:p>
             <a:pPr algn="ctr"/>
+            <a:endParaRPr/>
           </a:p>
         </p:txBody>
       </p:sp>
@@ -8270,6 +8403,7 @@
           <a:lstStyle/>
           <a:p>
             <a:pPr algn="ctr"/>
+            <a:endParaRPr/>
           </a:p>
         </p:txBody>
       </p:sp>
@@ -8347,6 +8481,7 @@
           <a:lstStyle/>
           <a:p>
             <a:pPr algn="ctr"/>
+            <a:endParaRPr/>
           </a:p>
         </p:txBody>
       </p:sp>
@@ -8390,6 +8525,7 @@
           <a:lstStyle/>
           <a:p>
             <a:pPr algn="ctr"/>
+            <a:endParaRPr/>
           </a:p>
         </p:txBody>
       </p:sp>
@@ -8467,6 +8603,7 @@
           <a:lstStyle/>
           <a:p>
             <a:pPr algn="ctr"/>
+            <a:endParaRPr/>
           </a:p>
         </p:txBody>
       </p:sp>
@@ -8510,6 +8647,7 @@
           <a:lstStyle/>
           <a:p>
             <a:pPr algn="ctr"/>
+            <a:endParaRPr/>
           </a:p>
         </p:txBody>
       </p:sp>
@@ -8587,6 +8725,7 @@
           <a:lstStyle/>
           <a:p>
             <a:pPr algn="ctr"/>
+            <a:endParaRPr/>
           </a:p>
         </p:txBody>
       </p:sp>
@@ -8630,6 +8769,7 @@
           <a:lstStyle/>
           <a:p>
             <a:pPr algn="ctr"/>
+            <a:endParaRPr/>
           </a:p>
         </p:txBody>
       </p:sp>
@@ -8707,6 +8847,7 @@
           <a:lstStyle/>
           <a:p>
             <a:pPr algn="ctr"/>
+            <a:endParaRPr/>
           </a:p>
         </p:txBody>
       </p:sp>
@@ -8750,6 +8891,7 @@
           <a:lstStyle/>
           <a:p>
             <a:pPr algn="ctr"/>
+            <a:endParaRPr/>
           </a:p>
         </p:txBody>
       </p:sp>
@@ -8827,6 +8969,7 @@
           <a:lstStyle/>
           <a:p>
             <a:pPr algn="ctr"/>
+            <a:endParaRPr/>
           </a:p>
         </p:txBody>
       </p:sp>
@@ -8870,6 +9013,7 @@
           <a:lstStyle/>
           <a:p>
             <a:pPr algn="ctr"/>
+            <a:endParaRPr/>
           </a:p>
         </p:txBody>
       </p:sp>
@@ -8947,6 +9091,7 @@
           <a:lstStyle/>
           <a:p>
             <a:pPr algn="ctr"/>
+            <a:endParaRPr/>
           </a:p>
         </p:txBody>
       </p:sp>
@@ -8990,6 +9135,7 @@
           <a:lstStyle/>
           <a:p>
             <a:pPr algn="ctr"/>
+            <a:endParaRPr/>
           </a:p>
         </p:txBody>
       </p:sp>
@@ -9067,6 +9213,7 @@
           <a:lstStyle/>
           <a:p>
             <a:pPr algn="ctr"/>
+            <a:endParaRPr/>
           </a:p>
         </p:txBody>
       </p:sp>
@@ -9110,6 +9257,7 @@
           <a:lstStyle/>
           <a:p>
             <a:pPr algn="ctr"/>
+            <a:endParaRPr/>
           </a:p>
         </p:txBody>
       </p:sp>
@@ -9187,6 +9335,7 @@
           <a:lstStyle/>
           <a:p>
             <a:pPr algn="ctr"/>
+            <a:endParaRPr/>
           </a:p>
         </p:txBody>
       </p:sp>
@@ -9230,6 +9379,7 @@
           <a:lstStyle/>
           <a:p>
             <a:pPr algn="ctr"/>
+            <a:endParaRPr/>
           </a:p>
         </p:txBody>
       </p:sp>
@@ -9307,6 +9457,7 @@
           <a:lstStyle/>
           <a:p>
             <a:pPr algn="ctr"/>
+            <a:endParaRPr/>
           </a:p>
         </p:txBody>
       </p:sp>
@@ -9350,6 +9501,7 @@
           <a:lstStyle/>
           <a:p>
             <a:pPr algn="ctr"/>
+            <a:endParaRPr/>
           </a:p>
         </p:txBody>
       </p:sp>
@@ -9427,6 +9579,7 @@
           <a:lstStyle/>
           <a:p>
             <a:pPr algn="ctr"/>
+            <a:endParaRPr/>
           </a:p>
         </p:txBody>
       </p:sp>
@@ -9470,6 +9623,7 @@
           <a:lstStyle/>
           <a:p>
             <a:pPr algn="ctr"/>
+            <a:endParaRPr/>
           </a:p>
         </p:txBody>
       </p:sp>
@@ -9547,6 +9701,7 @@
           <a:lstStyle/>
           <a:p>
             <a:pPr algn="ctr"/>
+            <a:endParaRPr/>
           </a:p>
         </p:txBody>
       </p:sp>
@@ -9590,6 +9745,7 @@
           <a:lstStyle/>
           <a:p>
             <a:pPr algn="ctr"/>
+            <a:endParaRPr/>
           </a:p>
         </p:txBody>
       </p:sp>
@@ -9667,6 +9823,7 @@
           <a:lstStyle/>
           <a:p>
             <a:pPr algn="ctr"/>
+            <a:endParaRPr/>
           </a:p>
         </p:txBody>
       </p:sp>
@@ -9710,6 +9867,7 @@
           <a:lstStyle/>
           <a:p>
             <a:pPr algn="ctr"/>
+            <a:endParaRPr/>
           </a:p>
         </p:txBody>
       </p:sp>
@@ -9787,6 +9945,7 @@
           <a:lstStyle/>
           <a:p>
             <a:pPr algn="ctr"/>
+            <a:endParaRPr/>
           </a:p>
         </p:txBody>
       </p:sp>
@@ -9830,6 +9989,7 @@
           <a:lstStyle/>
           <a:p>
             <a:pPr algn="ctr"/>
+            <a:endParaRPr/>
           </a:p>
         </p:txBody>
       </p:sp>
@@ -9907,6 +10067,7 @@
           <a:lstStyle/>
           <a:p>
             <a:pPr algn="ctr"/>
+            <a:endParaRPr/>
           </a:p>
         </p:txBody>
       </p:sp>
@@ -9950,6 +10111,7 @@
           <a:lstStyle/>
           <a:p>
             <a:pPr algn="ctr"/>
+            <a:endParaRPr/>
           </a:p>
         </p:txBody>
       </p:sp>
@@ -10027,6 +10189,7 @@
           <a:lstStyle/>
           <a:p>
             <a:pPr algn="ctr"/>
+            <a:endParaRPr/>
           </a:p>
         </p:txBody>
       </p:sp>
@@ -10070,6 +10233,7 @@
           <a:lstStyle/>
           <a:p>
             <a:pPr algn="ctr"/>
+            <a:endParaRPr/>
           </a:p>
         </p:txBody>
       </p:sp>
@@ -10147,6 +10311,7 @@
           <a:lstStyle/>
           <a:p>
             <a:pPr algn="ctr"/>
+            <a:endParaRPr/>
           </a:p>
         </p:txBody>
       </p:sp>
@@ -10190,6 +10355,7 @@
           <a:lstStyle/>
           <a:p>
             <a:pPr algn="ctr"/>
+            <a:endParaRPr/>
           </a:p>
         </p:txBody>
       </p:sp>
@@ -10267,6 +10433,7 @@
           <a:lstStyle/>
           <a:p>
             <a:pPr algn="ctr"/>
+            <a:endParaRPr/>
           </a:p>
         </p:txBody>
       </p:sp>
@@ -10310,6 +10477,7 @@
           <a:lstStyle/>
           <a:p>
             <a:pPr algn="ctr"/>
+            <a:endParaRPr/>
           </a:p>
         </p:txBody>
       </p:sp>
@@ -10387,6 +10555,7 @@
           <a:lstStyle/>
           <a:p>
             <a:pPr algn="ctr"/>
+            <a:endParaRPr/>
           </a:p>
         </p:txBody>
       </p:sp>
@@ -10430,6 +10599,7 @@
           <a:lstStyle/>
           <a:p>
             <a:pPr algn="ctr"/>
+            <a:endParaRPr/>
           </a:p>
         </p:txBody>
       </p:sp>
@@ -10541,6 +10711,7 @@
           <a:lstStyle/>
           <a:p>
             <a:pPr algn="ctr"/>
+            <a:endParaRPr/>
           </a:p>
         </p:txBody>
       </p:sp>
@@ -10621,7 +10792,7 @@
 </file>
 
 <file path=ppt/slides/slide5.xml><?xml version="1.0" encoding="utf-8"?>
-<p:sld xmlns:a="http://schemas.openxmlformats.org/drawingml/2006/main" xmlns:p="http://schemas.openxmlformats.org/presentationml/2006/main" xmlns:r="http://schemas.openxmlformats.org/officeDocument/2006/relationships">
+<p:sld xmlns:a="http://schemas.openxmlformats.org/drawingml/2006/main" xmlns:r="http://schemas.openxmlformats.org/officeDocument/2006/relationships" xmlns:p="http://schemas.openxmlformats.org/presentationml/2006/main">
   <p:cSld>
     <p:spTree>
       <p:nvGrpSpPr>
@@ -10629,7 +10800,14 @@
         <p:cNvGrpSpPr/>
         <p:nvPr/>
       </p:nvGrpSpPr>
-      <p:grpSpPr/>
+      <p:grpSpPr>
+        <a:xfrm>
+          <a:off x="0" y="0"/>
+          <a:ext cx="0" cy="0"/>
+          <a:chOff x="0" y="0"/>
+          <a:chExt cx="0" cy="0"/>
+        </a:xfrm>
+      </p:grpSpPr>
       <p:sp>
         <p:nvSpPr>
           <p:cNvPr id="2" name="Rectangle 1"/>
@@ -10670,6 +10848,7 @@
           <a:lstStyle/>
           <a:p>
             <a:pPr algn="ctr"/>
+            <a:endParaRPr/>
           </a:p>
         </p:txBody>
       </p:sp>
@@ -10713,6 +10892,7 @@
           <a:lstStyle/>
           <a:p>
             <a:pPr algn="ctr"/>
+            <a:endParaRPr/>
           </a:p>
         </p:txBody>
       </p:sp>
@@ -10824,6 +11004,7 @@
           <a:lstStyle/>
           <a:p>
             <a:pPr algn="ctr"/>
+            <a:endParaRPr/>
           </a:p>
         </p:txBody>
       </p:sp>
@@ -10867,6 +11048,7 @@
           <a:lstStyle/>
           <a:p>
             <a:pPr algn="ctr"/>
+            <a:endParaRPr/>
           </a:p>
         </p:txBody>
       </p:sp>
@@ -10879,7 +11061,7 @@
         <p:spPr>
           <a:xfrm>
             <a:off x="320040" y="1325880"/>
-            <a:ext cx="2560320" cy="457200"/>
+            <a:ext cx="2560320" cy="566928"/>
           </a:xfrm>
           <a:prstGeom prst="rect">
             <a:avLst/>
@@ -10910,6 +11092,7 @@
           <a:lstStyle/>
           <a:p>
             <a:pPr algn="ctr"/>
+            <a:endParaRPr/>
           </a:p>
         </p:txBody>
       </p:sp>
@@ -10937,7 +11120,7 @@
           <a:p>
             <a:pPr algn="ctr"/>
             <a:r>
-              <a:rPr sz="1400" b="1" i="0">
+              <a:rPr sz="1400" b="1" i="0" dirty="0">
                 <a:solidFill>
                   <a:srgbClr val="FFFFFF"/>
                 </a:solidFill>
@@ -10956,7 +11139,7 @@
         </p:nvSpPr>
         <p:spPr>
           <a:xfrm>
-            <a:off x="429768" y="1874520"/>
+            <a:off x="397764" y="2135124"/>
             <a:ext cx="2340864" cy="1691640"/>
           </a:xfrm>
           <a:prstGeom prst="rect">
@@ -10972,15 +11155,52 @@
           <a:p>
             <a:pPr algn="ctr"/>
             <a:r>
-              <a:rPr sz="1300" b="0" i="0">
+              <a:rPr sz="1300" b="0" i="0" dirty="0" err="1">
                 <a:solidFill>
                   <a:srgbClr val="E8EDF2"/>
                 </a:solidFill>
               </a:rPr>
-              <a:t>GridSearchCV
+              <a:t>GridSearchCV</a:t>
+            </a:r>
+            <a:r>
+              <a:rPr sz="1300" b="0" i="0" dirty="0">
+                <a:solidFill>
+                  <a:srgbClr val="E8EDF2"/>
+                </a:solidFill>
+              </a:rPr>
+              <a:t>
 Refined RF
-→ .pkl + feature_info.json</a:t>
-            </a:r>
+→ .</a:t>
+            </a:r>
+            <a:r>
+              <a:rPr sz="1300" b="0" i="0" dirty="0" err="1">
+                <a:solidFill>
+                  <a:srgbClr val="E8EDF2"/>
+                </a:solidFill>
+              </a:rPr>
+              <a:t>pkl</a:t>
+            </a:r>
+            <a:r>
+              <a:rPr sz="1300" b="0" i="0" dirty="0">
+                <a:solidFill>
+                  <a:srgbClr val="E8EDF2"/>
+                </a:solidFill>
+              </a:rPr>
+              <a:t> + </a:t>
+            </a:r>
+            <a:r>
+              <a:rPr sz="1300" b="0" i="0" dirty="0" err="1">
+                <a:solidFill>
+                  <a:srgbClr val="E8EDF2"/>
+                </a:solidFill>
+              </a:rPr>
+              <a:t>feature_info.json</a:t>
+            </a:r>
+            <a:endParaRPr sz="1300" b="0" i="0" dirty="0">
+              <a:solidFill>
+                <a:srgbClr val="E8EDF2"/>
+              </a:solidFill>
+            </a:endParaRPr>
           </a:p>
         </p:txBody>
       </p:sp>
@@ -11058,6 +11278,7 @@
           <a:lstStyle/>
           <a:p>
             <a:pPr algn="ctr"/>
+            <a:endParaRPr/>
           </a:p>
         </p:txBody>
       </p:sp>
@@ -11070,7 +11291,7 @@
         <p:spPr>
           <a:xfrm>
             <a:off x="3081528" y="1325880"/>
-            <a:ext cx="2560320" cy="457200"/>
+            <a:ext cx="2560320" cy="566928"/>
           </a:xfrm>
           <a:prstGeom prst="rect">
             <a:avLst/>
@@ -11101,6 +11322,7 @@
           <a:lstStyle/>
           <a:p>
             <a:pPr algn="ctr"/>
+            <a:endParaRPr/>
           </a:p>
         </p:txBody>
       </p:sp>
@@ -11147,7 +11369,7 @@
         </p:nvSpPr>
         <p:spPr>
           <a:xfrm>
-            <a:off x="3191256" y="1874520"/>
+            <a:off x="3172968" y="2077974"/>
             <a:ext cx="2340864" cy="1691640"/>
           </a:xfrm>
           <a:prstGeom prst="rect">
@@ -11163,7 +11385,7 @@
           <a:p>
             <a:pPr algn="ctr"/>
             <a:r>
-              <a:rPr sz="1300" b="0" i="0">
+              <a:rPr sz="1300" b="0" i="0" dirty="0">
                 <a:solidFill>
                   <a:srgbClr val="E8EDF2"/>
                 </a:solidFill>
@@ -11249,6 +11471,7 @@
           <a:lstStyle/>
           <a:p>
             <a:pPr algn="ctr"/>
+            <a:endParaRPr/>
           </a:p>
         </p:txBody>
       </p:sp>
@@ -11261,7 +11484,7 @@
         <p:spPr>
           <a:xfrm>
             <a:off x="5843016" y="1325880"/>
-            <a:ext cx="2560320" cy="457200"/>
+            <a:ext cx="2560320" cy="548640"/>
           </a:xfrm>
           <a:prstGeom prst="rect">
             <a:avLst/>
@@ -11292,6 +11515,7 @@
           <a:lstStyle/>
           <a:p>
             <a:pPr algn="ctr"/>
+            <a:endParaRPr/>
           </a:p>
         </p:txBody>
       </p:sp>
@@ -11338,7 +11562,7 @@
         </p:nvSpPr>
         <p:spPr>
           <a:xfrm>
-            <a:off x="5952744" y="1874520"/>
+            <a:off x="5934456" y="2080888"/>
             <a:ext cx="2340864" cy="1691640"/>
           </a:xfrm>
           <a:prstGeom prst="rect">
@@ -11354,7 +11578,7 @@
           <a:p>
             <a:pPr algn="ctr"/>
             <a:r>
-              <a:rPr sz="1300" b="0" i="0">
+              <a:rPr sz="1300" b="0" i="0" dirty="0">
                 <a:solidFill>
                   <a:srgbClr val="E8EDF2"/>
                 </a:solidFill>
@@ -11440,6 +11664,7 @@
           <a:lstStyle/>
           <a:p>
             <a:pPr algn="ctr"/>
+            <a:endParaRPr/>
           </a:p>
         </p:txBody>
       </p:sp>
@@ -11452,7 +11677,7 @@
         <p:spPr>
           <a:xfrm>
             <a:off x="8604504" y="1325880"/>
-            <a:ext cx="2560320" cy="457200"/>
+            <a:ext cx="2560320" cy="548640"/>
           </a:xfrm>
           <a:prstGeom prst="rect">
             <a:avLst/>
@@ -11483,6 +11708,7 @@
           <a:lstStyle/>
           <a:p>
             <a:pPr algn="ctr"/>
+            <a:endParaRPr/>
           </a:p>
         </p:txBody>
       </p:sp>
@@ -11529,7 +11755,7 @@
         </p:nvSpPr>
         <p:spPr>
           <a:xfrm>
-            <a:off x="8714232" y="1874520"/>
+            <a:off x="8714232" y="2080888"/>
             <a:ext cx="2340864" cy="1691640"/>
           </a:xfrm>
           <a:prstGeom prst="rect">
@@ -11545,7 +11771,7 @@
           <a:p>
             <a:pPr algn="ctr"/>
             <a:r>
-              <a:rPr sz="1300" b="0" i="0">
+              <a:rPr sz="1300" b="0" i="0" dirty="0">
                 <a:solidFill>
                   <a:srgbClr val="E8EDF2"/>
                 </a:solidFill>
@@ -11565,7 +11791,7 @@
         </p:nvSpPr>
         <p:spPr>
           <a:xfrm>
-            <a:off x="320040" y="3858768"/>
+            <a:off x="320040" y="3954780"/>
             <a:ext cx="11521440" cy="2286000"/>
           </a:xfrm>
           <a:prstGeom prst="rect">
@@ -11585,12 +11811,28 @@
               </a:spcBef>
             </a:pPr>
             <a:r>
-              <a:rPr sz="1300">
+              <a:rPr sz="1300" dirty="0">
                 <a:solidFill>
                   <a:srgbClr val="E8EDF2"/>
                 </a:solidFill>
               </a:rPr>
-              <a:t>1.  Collector opens the web / Streamlit app and fills in invoice details (amount, country, credit terms, customer history)</a:t>
+              <a:t>1.  Collector opens the web / </a:t>
+            </a:r>
+            <a:r>
+              <a:rPr sz="1300" dirty="0" err="1">
+                <a:solidFill>
+                  <a:srgbClr val="E8EDF2"/>
+                </a:solidFill>
+              </a:rPr>
+              <a:t>Streamlit</a:t>
+            </a:r>
+            <a:r>
+              <a:rPr sz="1300" dirty="0">
+                <a:solidFill>
+                  <a:srgbClr val="E8EDF2"/>
+                </a:solidFill>
+              </a:rPr>
+              <a:t> app and fills in invoice details (amount, country, credit terms, customer history)</a:t>
             </a:r>
           </a:p>
           <a:p>
@@ -11600,12 +11842,28 @@
               </a:spcBef>
             </a:pPr>
             <a:r>
-              <a:rPr sz="1300">
+              <a:rPr sz="1300" dirty="0">
                 <a:solidFill>
                   <a:srgbClr val="E8EDF2"/>
                 </a:solidFill>
               </a:rPr>
-              <a:t>2.  Form POSTs to FastAPI → model returns a risk score (0–1) and label (Dispute / No Dispute)</a:t>
+              <a:t>2.  Form POSTs to </a:t>
+            </a:r>
+            <a:r>
+              <a:rPr sz="1300" dirty="0" err="1">
+                <a:solidFill>
+                  <a:srgbClr val="E8EDF2"/>
+                </a:solidFill>
+              </a:rPr>
+              <a:t>FastAPI</a:t>
+            </a:r>
+            <a:r>
+              <a:rPr sz="1300" dirty="0">
+                <a:solidFill>
+                  <a:srgbClr val="E8EDF2"/>
+                </a:solidFill>
+              </a:rPr>
+              <a:t> → model returns a risk score (0–1) and label (Dispute / No Dispute)</a:t>
             </a:r>
           </a:p>
           <a:p>
@@ -11615,7 +11873,7 @@
               </a:spcBef>
             </a:pPr>
             <a:r>
-              <a:rPr sz="1300">
+              <a:rPr sz="1300" dirty="0">
                 <a:solidFill>
                   <a:srgbClr val="E8EDF2"/>
                 </a:solidFill>
@@ -11630,7 +11888,7 @@
               </a:spcBef>
             </a:pPr>
             <a:r>
-              <a:rPr sz="1300">
+              <a:rPr sz="1300" dirty="0">
                 <a:solidFill>
                   <a:srgbClr val="E8EDF2"/>
                 </a:solidFill>
@@ -11714,6 +11972,7 @@
           <a:lstStyle/>
           <a:p>
             <a:pPr algn="ctr"/>
+            <a:endParaRPr/>
           </a:p>
         </p:txBody>
       </p:sp>
@@ -11794,7 +12053,7 @@
 </file>
 
 <file path=ppt/slides/slide6.xml><?xml version="1.0" encoding="utf-8"?>
-<p:sld xmlns:a="http://schemas.openxmlformats.org/drawingml/2006/main" xmlns:p="http://schemas.openxmlformats.org/presentationml/2006/main" xmlns:r="http://schemas.openxmlformats.org/officeDocument/2006/relationships">
+<p:sld xmlns:a="http://schemas.openxmlformats.org/drawingml/2006/main" xmlns:r="http://schemas.openxmlformats.org/officeDocument/2006/relationships" xmlns:p="http://schemas.openxmlformats.org/presentationml/2006/main">
   <p:cSld>
     <p:spTree>
       <p:nvGrpSpPr>
@@ -11802,7 +12061,14 @@
         <p:cNvGrpSpPr/>
         <p:nvPr/>
       </p:nvGrpSpPr>
-      <p:grpSpPr/>
+      <p:grpSpPr>
+        <a:xfrm>
+          <a:off x="0" y="0"/>
+          <a:ext cx="0" cy="0"/>
+          <a:chOff x="0" y="0"/>
+          <a:chExt cx="0" cy="0"/>
+        </a:xfrm>
+      </p:grpSpPr>
       <p:sp>
         <p:nvSpPr>
           <p:cNvPr id="2" name="Rectangle 1"/>
@@ -11843,6 +12109,7 @@
           <a:lstStyle/>
           <a:p>
             <a:pPr algn="ctr"/>
+            <a:endParaRPr/>
           </a:p>
         </p:txBody>
       </p:sp>
@@ -11886,6 +12153,7 @@
           <a:lstStyle/>
           <a:p>
             <a:pPr algn="ctr"/>
+            <a:endParaRPr/>
           </a:p>
         </p:txBody>
       </p:sp>
@@ -11997,6 +12265,7 @@
           <a:lstStyle/>
           <a:p>
             <a:pPr algn="ctr"/>
+            <a:endParaRPr/>
           </a:p>
         </p:txBody>
       </p:sp>
@@ -12040,6 +12309,7 @@
           <a:lstStyle/>
           <a:p>
             <a:pPr algn="ctr"/>
+            <a:endParaRPr/>
           </a:p>
         </p:txBody>
       </p:sp>
@@ -12083,6 +12353,7 @@
           <a:lstStyle/>
           <a:p>
             <a:pPr algn="ctr"/>
+            <a:endParaRPr/>
           </a:p>
         </p:txBody>
       </p:sp>
@@ -12128,8 +12399,8 @@
         </p:nvSpPr>
         <p:spPr>
           <a:xfrm>
-            <a:off x="457200" y="1737360"/>
-            <a:ext cx="5394960" cy="2697480"/>
+            <a:off x="274320" y="1737360"/>
+            <a:ext cx="5669280" cy="1297791"/>
           </a:xfrm>
           <a:prstGeom prst="rect">
             <a:avLst/>
@@ -12148,12 +12419,44 @@
               </a:spcBef>
             </a:pPr>
             <a:r>
-              <a:rPr sz="1300">
+              <a:rPr sz="1300" dirty="0">
                 <a:solidFill>
                   <a:srgbClr val="E8EDF2"/>
                 </a:solidFill>
               </a:rPr>
-              <a:t>  InvoiceAmount  (~35%)   — larger invoices carry significantly higher dispute risk</a:t>
+              <a:t>  </a:t>
+            </a:r>
+            <a:r>
+              <a:rPr sz="1300" dirty="0" err="1">
+                <a:solidFill>
+                  <a:srgbClr val="E8EDF2"/>
+                </a:solidFill>
+              </a:rPr>
+              <a:t>InvoiceAmount</a:t>
+            </a:r>
+            <a:r>
+              <a:rPr sz="1300" dirty="0">
+                <a:solidFill>
+                  <a:srgbClr val="E8EDF2"/>
+                </a:solidFill>
+              </a:rPr>
+              <a:t>  (~35%)   — larger invoices carry significantly higher dispute</a:t>
+            </a:r>
+            <a:r>
+              <a:rPr lang="en-US" sz="1300" dirty="0">
+                <a:solidFill>
+                  <a:srgbClr val="E8EDF2"/>
+                </a:solidFill>
+              </a:rPr>
+              <a:t> </a:t>
+            </a:r>
+            <a:r>
+              <a:rPr sz="1300" dirty="0">
+                <a:solidFill>
+                  <a:srgbClr val="E8EDF2"/>
+                </a:solidFill>
+              </a:rPr>
+              <a:t>risk</a:t>
             </a:r>
           </a:p>
           <a:p>
@@ -12163,12 +12466,44 @@
               </a:spcBef>
             </a:pPr>
             <a:r>
-              <a:rPr sz="1300">
+              <a:rPr sz="1300" dirty="0">
                 <a:solidFill>
                   <a:srgbClr val="E8EDF2"/>
                 </a:solidFill>
               </a:rPr>
-              <a:t>  CustomerFreq  (~20%)    — newer customers (low freq) dispute more often</a:t>
+              <a:t>  </a:t>
+            </a:r>
+            <a:r>
+              <a:rPr sz="1300" dirty="0" err="1">
+                <a:solidFill>
+                  <a:srgbClr val="E8EDF2"/>
+                </a:solidFill>
+              </a:rPr>
+              <a:t>CustomerFreq</a:t>
+            </a:r>
+            <a:r>
+              <a:rPr sz="1300" dirty="0">
+                <a:solidFill>
+                  <a:srgbClr val="E8EDF2"/>
+                </a:solidFill>
+              </a:rPr>
+              <a:t>  (~20%)    — newer customers (low </a:t>
+            </a:r>
+            <a:r>
+              <a:rPr sz="1300" dirty="0" err="1">
+                <a:solidFill>
+                  <a:srgbClr val="E8EDF2"/>
+                </a:solidFill>
+              </a:rPr>
+              <a:t>freq</a:t>
+            </a:r>
+            <a:r>
+              <a:rPr sz="1300" dirty="0">
+                <a:solidFill>
+                  <a:srgbClr val="E8EDF2"/>
+                </a:solidFill>
+              </a:rPr>
+              <a:t>) dispute more often</a:t>
             </a:r>
           </a:p>
           <a:p>
@@ -12178,12 +12513,28 @@
               </a:spcBef>
             </a:pPr>
             <a:r>
-              <a:rPr sz="1300">
+              <a:rPr sz="1300" dirty="0">
                 <a:solidFill>
                   <a:srgbClr val="E8EDF2"/>
                 </a:solidFill>
               </a:rPr>
-              <a:t>  countryCode  (~16%)     — geographic patterns indicate regional credit risk</a:t>
+              <a:t>  </a:t>
+            </a:r>
+            <a:r>
+              <a:rPr sz="1300" dirty="0" err="1">
+                <a:solidFill>
+                  <a:srgbClr val="E8EDF2"/>
+                </a:solidFill>
+              </a:rPr>
+              <a:t>countryCode</a:t>
+            </a:r>
+            <a:r>
+              <a:rPr sz="1300" dirty="0">
+                <a:solidFill>
+                  <a:srgbClr val="E8EDF2"/>
+                </a:solidFill>
+              </a:rPr>
+              <a:t>  (~16%)     — geographic patterns indicate regional credit risk</a:t>
             </a:r>
           </a:p>
           <a:p>
@@ -12193,12 +12544,28 @@
               </a:spcBef>
             </a:pPr>
             <a:r>
-              <a:rPr sz="1300">
+              <a:rPr sz="1300" dirty="0">
                 <a:solidFill>
                   <a:srgbClr val="E8EDF2"/>
                 </a:solidFill>
               </a:rPr>
-              <a:t>  CreditTermDays (~12%)   — longer payment windows correlate with disputes</a:t>
+              <a:t>  </a:t>
+            </a:r>
+            <a:r>
+              <a:rPr sz="1300" dirty="0" err="1">
+                <a:solidFill>
+                  <a:srgbClr val="E8EDF2"/>
+                </a:solidFill>
+              </a:rPr>
+              <a:t>CreditTermDays</a:t>
+            </a:r>
+            <a:r>
+              <a:rPr sz="1300" dirty="0">
+                <a:solidFill>
+                  <a:srgbClr val="E8EDF2"/>
+                </a:solidFill>
+              </a:rPr>
+              <a:t> (~12%)   — longer payment windows correlate with disputes</a:t>
             </a:r>
           </a:p>
           <a:p>
@@ -12208,12 +12575,28 @@
               </a:spcBef>
             </a:pPr>
             <a:r>
-              <a:rPr sz="1300">
+              <a:rPr sz="1300" dirty="0">
                 <a:solidFill>
                   <a:srgbClr val="E8EDF2"/>
                 </a:solidFill>
               </a:rPr>
-              <a:t>  DaysSincePaperless (~10%) — newer e-billing adopters dispute more frequently</a:t>
+              <a:t>  </a:t>
+            </a:r>
+            <a:r>
+              <a:rPr sz="1300" dirty="0" err="1">
+                <a:solidFill>
+                  <a:srgbClr val="E8EDF2"/>
+                </a:solidFill>
+              </a:rPr>
+              <a:t>DaysSincePaperless</a:t>
+            </a:r>
+            <a:r>
+              <a:rPr sz="1300" dirty="0">
+                <a:solidFill>
+                  <a:srgbClr val="E8EDF2"/>
+                </a:solidFill>
+              </a:rPr>
+              <a:t> (~10%) — newer e-billing adopters dispute more frequently</a:t>
             </a:r>
           </a:p>
         </p:txBody>
@@ -12258,6 +12641,7 @@
           <a:lstStyle/>
           <a:p>
             <a:pPr algn="ctr"/>
+            <a:endParaRPr/>
           </a:p>
         </p:txBody>
       </p:sp>
@@ -12301,6 +12685,7 @@
           <a:lstStyle/>
           <a:p>
             <a:pPr algn="ctr"/>
+            <a:endParaRPr/>
           </a:p>
         </p:txBody>
       </p:sp>
@@ -12491,6 +12876,7 @@
           <a:lstStyle/>
           <a:p>
             <a:pPr algn="ctr"/>
+            <a:endParaRPr/>
           </a:p>
         </p:txBody>
       </p:sp>
@@ -12534,6 +12920,7 @@
           <a:lstStyle/>
           <a:p>
             <a:pPr algn="ctr"/>
+            <a:endParaRPr/>
           </a:p>
         </p:txBody>
       </p:sp>
@@ -12645,6 +13032,7 @@
           <a:lstStyle/>
           <a:p>
             <a:pPr algn="ctr"/>
+            <a:endParaRPr/>
           </a:p>
         </p:txBody>
       </p:sp>
